--- a/slides/pptx/week04.pptx
+++ b/slides/pptx/week04.pptx
@@ -8389,7 +8389,7 @@
                 <a:ea typeface="Calibri" pitchFamily="34" charset="-122"/>
                 <a:cs typeface="Calibri" pitchFamily="34" charset="-120"/>
               </a:rPr>
-              <a:t>Bulgaria: data on *almost all adults* leaked via SQLi</a:t>
+              <a:t>Bulgaria: data on almost all adults leaked via SQLi</a:t>
             </a:r>
             <a:endParaRPr lang="en-US" sz="1400" dirty="0"/>
           </a:p>

--- a/slides/pptx/week04.pptx
+++ b/slides/pptx/week04.pptx
@@ -2370,7 +2370,7 @@
     <p:bg>
       <p:bgPr>
         <a:solidFill>
-          <a:srgbClr val="0E1726"/>
+          <a:srgbClr val="FFFFFF"/>
         </a:solidFill>
       </p:bgPr>
     </p:bg>
@@ -2388,38 +2388,9 @@
           <a:chExt cx="0" cy="0"/>
         </a:xfrm>
       </p:grpSpPr>
-      <p:sp>
-        <p:nvSpPr>
-          <p:cNvPr id="2" name="Shape 0"/>
-          <p:cNvSpPr/>
-          <p:nvPr/>
-        </p:nvSpPr>
-        <p:spPr>
-          <a:xfrm>
-            <a:off x="603504" y="411480"/>
-            <a:ext cx="1874520" cy="932688"/>
-          </a:xfrm>
-          <a:prstGeom prst="roundRect">
-            <a:avLst>
-              <a:gd name="adj" fmla="val 7843"/>
-            </a:avLst>
-          </a:prstGeom>
-          <a:solidFill>
-            <a:srgbClr val="FFFFFF"/>
-          </a:solidFill>
-          <a:ln/>
-          <a:effectLst>
-            <a:outerShdw sx="100000" sy="100000" kx="0" ky="0" algn="bl" rotWithShape="0" blurRad="101600" dist="38100" dir="5400000">
-              <a:srgbClr val="000000">
-                <a:alpha val="35000"/>
-              </a:srgbClr>
-            </a:outerShdw>
-          </a:effectLst>
-        </p:spPr>
-      </p:sp>
       <p:pic>
         <p:nvPicPr>
-          <p:cNvPr id="3" name="Image 0" descr="/Users/pop7/Library/CloudStorage/OneDrive-MonsterConnectCo.,Ltd/Lecture/KOSEN69 - software-security/slides/pptx/assets/logo-small.png">    </p:cNvPr>
+          <p:cNvPr id="2" name="Image 0" descr="/Users/pop7/Library/CloudStorage/OneDrive-MonsterConnectCo.,Ltd/Lecture/KOSEN69 - software-security/slides/pptx/assets/logo-small.png">    </p:cNvPr>
           <p:cNvPicPr>
             <a:picLocks noChangeAspect="1"/>
           </p:cNvPicPr>
@@ -2433,8 +2404,8 @@
         </p:blipFill>
         <p:spPr>
           <a:xfrm>
-            <a:off x="758952" y="566928"/>
-            <a:ext cx="1563624" cy="621792"/>
+            <a:off x="640080" y="502920"/>
+            <a:ext cx="1691640" cy="676656"/>
           </a:xfrm>
           <a:prstGeom prst="rect">
             <a:avLst/>
@@ -2443,7 +2414,7 @@
       </p:pic>
       <p:sp>
         <p:nvSpPr>
-          <p:cNvPr id="4" name="Text 1"/>
+          <p:cNvPr id="3" name="Text 0"/>
           <p:cNvSpPr/>
           <p:nvPr/>
         </p:nvSpPr>
@@ -2482,7 +2453,7 @@
       </p:sp>
       <p:sp>
         <p:nvSpPr>
-          <p:cNvPr id="5" name="Text 2"/>
+          <p:cNvPr id="4" name="Text 1"/>
           <p:cNvSpPr/>
           <p:nvPr/>
         </p:nvSpPr>
@@ -2510,7 +2481,7 @@
             <a:r>
               <a:rPr lang="en-US" sz="4000" b="1" dirty="0">
                 <a:solidFill>
-                  <a:srgbClr val="E6EDF3"/>
+                  <a:srgbClr val="1F2937"/>
                 </a:solidFill>
                 <a:latin typeface="Arial" pitchFamily="34" charset="0"/>
                 <a:ea typeface="Arial" pitchFamily="34" charset="-122"/>
@@ -2524,7 +2495,7 @@
       </p:sp>
       <p:sp>
         <p:nvSpPr>
-          <p:cNvPr id="6" name="Text 3"/>
+          <p:cNvPr id="5" name="Text 2"/>
           <p:cNvSpPr/>
           <p:nvPr/>
         </p:nvSpPr>
@@ -2549,7 +2520,7 @@
             <a:r>
               <a:rPr lang="en-US" sz="1400" dirty="0">
                 <a:solidFill>
-                  <a:srgbClr val="94A3B8"/>
+                  <a:srgbClr val="64748B"/>
                 </a:solidFill>
                 <a:latin typeface="Calibri" pitchFamily="34" charset="0"/>
                 <a:ea typeface="Calibri" pitchFamily="34" charset="-122"/>
@@ -2575,7 +2546,7 @@
     <p:bg>
       <p:bgPr>
         <a:solidFill>
-          <a:srgbClr val="0E1726"/>
+          <a:srgbClr val="FFFFFF"/>
         </a:solidFill>
       </p:bgPr>
     </p:bg>
@@ -2612,9 +2583,9 @@
           </a:solidFill>
           <a:ln/>
           <a:effectLst>
-            <a:outerShdw sx="100000" sy="100000" kx="0" ky="0" algn="bl" rotWithShape="0" blurRad="101600" dist="38100" dir="5400000">
+            <a:outerShdw sx="100000" sy="100000" kx="0" ky="0" algn="bl" rotWithShape="0" blurRad="76200" dist="25400" dir="5400000">
               <a:srgbClr val="000000">
-                <a:alpha val="35000"/>
+                <a:alpha val="12000"/>
               </a:srgbClr>
             </a:outerShdw>
           </a:effectLst>
@@ -2671,7 +2642,7 @@
             <a:r>
               <a:rPr lang="en-US" sz="2600" b="1" dirty="0">
                 <a:solidFill>
-                  <a:srgbClr val="E6EDF3"/>
+                  <a:srgbClr val="1F2937"/>
                 </a:solidFill>
                 <a:latin typeface="Arial" pitchFamily="34" charset="0"/>
                 <a:ea typeface="Arial" pitchFamily="34" charset="-122"/>
@@ -2704,7 +2675,7 @@
           </a:solidFill>
           <a:ln w="12700">
             <a:solidFill>
-              <a:srgbClr val="1E2B45"/>
+              <a:srgbClr val="E8EDF3"/>
             </a:solidFill>
             <a:prstDash val="solid"/>
           </a:ln>
@@ -2783,13 +2754,13 @@
             </a:avLst>
           </a:prstGeom>
           <a:solidFill>
-            <a:srgbClr val="18243A"/>
+            <a:srgbClr val="F1F5F9"/>
           </a:solidFill>
           <a:ln/>
           <a:effectLst>
-            <a:outerShdw sx="100000" sy="100000" kx="0" ky="0" algn="bl" rotWithShape="0" blurRad="101600" dist="38100" dir="5400000">
+            <a:outerShdw sx="100000" sy="100000" kx="0" ky="0" algn="bl" rotWithShape="0" blurRad="76200" dist="25400" dir="5400000">
               <a:srgbClr val="000000">
-                <a:alpha val="35000"/>
+                <a:alpha val="12000"/>
               </a:srgbClr>
             </a:outerShdw>
           </a:effectLst>
@@ -2826,7 +2797,7 @@
             <a:r>
               <a:rPr lang="en-US" sz="1400" dirty="0">
                 <a:solidFill>
-                  <a:srgbClr val="E6EDF3"/>
+                  <a:srgbClr val="1F2937"/>
                 </a:solidFill>
                 <a:latin typeface="Calibri" pitchFamily="34" charset="0"/>
                 <a:ea typeface="Calibri" pitchFamily="34" charset="-122"/>
@@ -2847,7 +2818,7 @@
             <a:r>
               <a:rPr lang="en-US" sz="1400" dirty="0">
                 <a:solidFill>
-                  <a:srgbClr val="E6EDF3"/>
+                  <a:srgbClr val="1F2937"/>
                 </a:solidFill>
                 <a:latin typeface="Calibri" pitchFamily="34" charset="0"/>
                 <a:ea typeface="Calibri" pitchFamily="34" charset="-122"/>
@@ -2886,7 +2857,7 @@
             <a:r>
               <a:rPr lang="en-US" sz="900" dirty="0">
                 <a:solidFill>
-                  <a:srgbClr val="94A3B8"/>
+                  <a:srgbClr val="64748B"/>
                 </a:solidFill>
                 <a:latin typeface="Calibri" pitchFamily="34" charset="0"/>
                 <a:ea typeface="Calibri" pitchFamily="34" charset="-122"/>
@@ -2898,38 +2869,9 @@
           </a:p>
         </p:txBody>
       </p:sp>
-      <p:sp>
-        <p:nvSpPr>
-          <p:cNvPr id="10" name="Shape 7"/>
-          <p:cNvSpPr/>
-          <p:nvPr/>
-        </p:nvSpPr>
-        <p:spPr>
-          <a:xfrm>
-            <a:off x="7772400" y="4590288"/>
-            <a:ext cx="969264" cy="475488"/>
-          </a:xfrm>
-          <a:prstGeom prst="roundRect">
-            <a:avLst>
-              <a:gd name="adj" fmla="val 11538"/>
-            </a:avLst>
-          </a:prstGeom>
-          <a:solidFill>
-            <a:srgbClr val="FFFFFF"/>
-          </a:solidFill>
-          <a:ln/>
-          <a:effectLst>
-            <a:outerShdw sx="100000" sy="100000" kx="0" ky="0" algn="bl" rotWithShape="0" blurRad="101600" dist="38100" dir="5400000">
-              <a:srgbClr val="000000">
-                <a:alpha val="35000"/>
-              </a:srgbClr>
-            </a:outerShdw>
-          </a:effectLst>
-        </p:spPr>
-      </p:sp>
       <p:pic>
         <p:nvPicPr>
-          <p:cNvPr id="11" name="Image 1" descr="/Users/pop7/Library/CloudStorage/OneDrive-MonsterConnectCo.,Ltd/Lecture/KOSEN69 - software-security/slides/pptx/assets/logo-small.png">    </p:cNvPr>
+          <p:cNvPr id="10" name="Image 1" descr="/Users/pop7/Library/CloudStorage/OneDrive-MonsterConnectCo.,Ltd/Lecture/KOSEN69 - software-security/slides/pptx/assets/logo-small.png">    </p:cNvPr>
           <p:cNvPicPr>
             <a:picLocks noChangeAspect="1"/>
           </p:cNvPicPr>
@@ -2943,7 +2885,7 @@
         </p:blipFill>
         <p:spPr>
           <a:xfrm>
-            <a:off x="7872984" y="4681728"/>
+            <a:off x="7882128" y="4700016"/>
             <a:ext cx="768096" cy="356616"/>
           </a:xfrm>
           <a:prstGeom prst="rect">
@@ -2965,7 +2907,7 @@
     <p:bg>
       <p:bgPr>
         <a:solidFill>
-          <a:srgbClr val="0E1726"/>
+          <a:srgbClr val="FFFFFF"/>
         </a:solidFill>
       </p:bgPr>
     </p:bg>
@@ -3002,9 +2944,9 @@
           </a:solidFill>
           <a:ln/>
           <a:effectLst>
-            <a:outerShdw sx="100000" sy="100000" kx="0" ky="0" algn="bl" rotWithShape="0" blurRad="101600" dist="38100" dir="5400000">
+            <a:outerShdw sx="100000" sy="100000" kx="0" ky="0" algn="bl" rotWithShape="0" blurRad="76200" dist="25400" dir="5400000">
               <a:srgbClr val="000000">
-                <a:alpha val="35000"/>
+                <a:alpha val="12000"/>
               </a:srgbClr>
             </a:outerShdw>
           </a:effectLst>
@@ -3061,7 +3003,7 @@
             <a:r>
               <a:rPr lang="en-US" sz="2600" b="1" dirty="0">
                 <a:solidFill>
-                  <a:srgbClr val="E6EDF3"/>
+                  <a:srgbClr val="1F2937"/>
                 </a:solidFill>
                 <a:latin typeface="Arial" pitchFamily="34" charset="0"/>
                 <a:ea typeface="Arial" pitchFamily="34" charset="-122"/>
@@ -3100,7 +3042,7 @@
             <a:r>
               <a:rPr lang="en-US" sz="1400" dirty="0">
                 <a:solidFill>
-                  <a:srgbClr val="E6EDF3"/>
+                  <a:srgbClr val="1F2937"/>
                 </a:solidFill>
                 <a:latin typeface="Calibri" pitchFamily="34" charset="0"/>
                 <a:ea typeface="Calibri" pitchFamily="34" charset="-122"/>
@@ -3133,7 +3075,7 @@
           </a:solidFill>
           <a:ln w="12700">
             <a:solidFill>
-              <a:srgbClr val="1E2B45"/>
+              <a:srgbClr val="E8EDF3"/>
             </a:solidFill>
             <a:prstDash val="solid"/>
           </a:ln>
@@ -3195,13 +3137,13 @@
             </a:avLst>
           </a:prstGeom>
           <a:solidFill>
-            <a:srgbClr val="18243A"/>
+            <a:srgbClr val="F1F5F9"/>
           </a:solidFill>
           <a:ln/>
           <a:effectLst>
-            <a:outerShdw sx="100000" sy="100000" kx="0" ky="0" algn="bl" rotWithShape="0" blurRad="101600" dist="38100" dir="5400000">
+            <a:outerShdw sx="100000" sy="100000" kx="0" ky="0" algn="bl" rotWithShape="0" blurRad="76200" dist="25400" dir="5400000">
               <a:srgbClr val="000000">
-                <a:alpha val="35000"/>
+                <a:alpha val="12000"/>
               </a:srgbClr>
             </a:outerShdw>
           </a:effectLst>
@@ -3238,7 +3180,7 @@
             <a:r>
               <a:rPr lang="en-US" sz="1400" dirty="0">
                 <a:solidFill>
-                  <a:srgbClr val="E6EDF3"/>
+                  <a:srgbClr val="1F2937"/>
                 </a:solidFill>
                 <a:latin typeface="Calibri" pitchFamily="34" charset="0"/>
                 <a:ea typeface="Calibri" pitchFamily="34" charset="-122"/>
@@ -3259,7 +3201,7 @@
             <a:r>
               <a:rPr lang="en-US" sz="1400" dirty="0">
                 <a:solidFill>
-                  <a:srgbClr val="E6EDF3"/>
+                  <a:srgbClr val="1F2937"/>
                 </a:solidFill>
                 <a:latin typeface="Calibri" pitchFamily="34" charset="0"/>
                 <a:ea typeface="Calibri" pitchFamily="34" charset="-122"/>
@@ -3280,7 +3222,7 @@
             <a:r>
               <a:rPr lang="en-US" sz="1400" dirty="0">
                 <a:solidFill>
-                  <a:srgbClr val="E6EDF3"/>
+                  <a:srgbClr val="1F2937"/>
                 </a:solidFill>
                 <a:latin typeface="Calibri" pitchFamily="34" charset="0"/>
                 <a:ea typeface="Calibri" pitchFamily="34" charset="-122"/>
@@ -3319,7 +3261,7 @@
             <a:r>
               <a:rPr lang="en-US" sz="900" dirty="0">
                 <a:solidFill>
-                  <a:srgbClr val="94A3B8"/>
+                  <a:srgbClr val="64748B"/>
                 </a:solidFill>
                 <a:latin typeface="Calibri" pitchFamily="34" charset="0"/>
                 <a:ea typeface="Calibri" pitchFamily="34" charset="-122"/>
@@ -3331,38 +3273,9 @@
           </a:p>
         </p:txBody>
       </p:sp>
-      <p:sp>
-        <p:nvSpPr>
-          <p:cNvPr id="11" name="Shape 8"/>
-          <p:cNvSpPr/>
-          <p:nvPr/>
-        </p:nvSpPr>
-        <p:spPr>
-          <a:xfrm>
-            <a:off x="7772400" y="4590288"/>
-            <a:ext cx="969264" cy="475488"/>
-          </a:xfrm>
-          <a:prstGeom prst="roundRect">
-            <a:avLst>
-              <a:gd name="adj" fmla="val 11538"/>
-            </a:avLst>
-          </a:prstGeom>
-          <a:solidFill>
-            <a:srgbClr val="FFFFFF"/>
-          </a:solidFill>
-          <a:ln/>
-          <a:effectLst>
-            <a:outerShdw sx="100000" sy="100000" kx="0" ky="0" algn="bl" rotWithShape="0" blurRad="101600" dist="38100" dir="5400000">
-              <a:srgbClr val="000000">
-                <a:alpha val="35000"/>
-              </a:srgbClr>
-            </a:outerShdw>
-          </a:effectLst>
-        </p:spPr>
-      </p:sp>
       <p:pic>
         <p:nvPicPr>
-          <p:cNvPr id="12" name="Image 1" descr="/Users/pop7/Library/CloudStorage/OneDrive-MonsterConnectCo.,Ltd/Lecture/KOSEN69 - software-security/slides/pptx/assets/logo-small.png">    </p:cNvPr>
+          <p:cNvPr id="11" name="Image 1" descr="/Users/pop7/Library/CloudStorage/OneDrive-MonsterConnectCo.,Ltd/Lecture/KOSEN69 - software-security/slides/pptx/assets/logo-small.png">    </p:cNvPr>
           <p:cNvPicPr>
             <a:picLocks noChangeAspect="1"/>
           </p:cNvPicPr>
@@ -3376,7 +3289,7 @@
         </p:blipFill>
         <p:spPr>
           <a:xfrm>
-            <a:off x="7872984" y="4681728"/>
+            <a:off x="7882128" y="4700016"/>
             <a:ext cx="768096" cy="356616"/>
           </a:xfrm>
           <a:prstGeom prst="rect">
@@ -3398,7 +3311,7 @@
     <p:bg>
       <p:bgPr>
         <a:solidFill>
-          <a:srgbClr val="0E1726"/>
+          <a:srgbClr val="FFFFFF"/>
         </a:solidFill>
       </p:bgPr>
     </p:bg>
@@ -3435,9 +3348,9 @@
           </a:solidFill>
           <a:ln/>
           <a:effectLst>
-            <a:outerShdw sx="100000" sy="100000" kx="0" ky="0" algn="bl" rotWithShape="0" blurRad="101600" dist="38100" dir="5400000">
+            <a:outerShdw sx="100000" sy="100000" kx="0" ky="0" algn="bl" rotWithShape="0" blurRad="76200" dist="25400" dir="5400000">
               <a:srgbClr val="000000">
-                <a:alpha val="35000"/>
+                <a:alpha val="12000"/>
               </a:srgbClr>
             </a:outerShdw>
           </a:effectLst>
@@ -3494,7 +3407,7 @@
             <a:r>
               <a:rPr lang="en-US" sz="2600" b="1" dirty="0">
                 <a:solidFill>
-                  <a:srgbClr val="E6EDF3"/>
+                  <a:srgbClr val="1F2937"/>
                 </a:solidFill>
                 <a:latin typeface="Arial" pitchFamily="34" charset="0"/>
                 <a:ea typeface="Arial" pitchFamily="34" charset="-122"/>
@@ -3523,13 +3436,13 @@
             </a:avLst>
           </a:prstGeom>
           <a:solidFill>
-            <a:srgbClr val="18243A"/>
+            <a:srgbClr val="F1F5F9"/>
           </a:solidFill>
           <a:ln/>
           <a:effectLst>
-            <a:outerShdw sx="100000" sy="100000" kx="0" ky="0" algn="bl" rotWithShape="0" blurRad="101600" dist="38100" dir="5400000">
+            <a:outerShdw sx="100000" sy="100000" kx="0" ky="0" algn="bl" rotWithShape="0" blurRad="76200" dist="25400" dir="5400000">
               <a:srgbClr val="000000">
-                <a:alpha val="35000"/>
+                <a:alpha val="12000"/>
               </a:srgbClr>
             </a:outerShdw>
           </a:effectLst>
@@ -3566,7 +3479,7 @@
             <a:r>
               <a:rPr lang="en-US" sz="1400" dirty="0">
                 <a:solidFill>
-                  <a:srgbClr val="E6EDF3"/>
+                  <a:srgbClr val="1F2937"/>
                 </a:solidFill>
                 <a:latin typeface="Calibri" pitchFamily="34" charset="0"/>
                 <a:ea typeface="Calibri" pitchFamily="34" charset="-122"/>
@@ -3587,7 +3500,7 @@
             <a:r>
               <a:rPr lang="en-US" sz="1400" dirty="0">
                 <a:solidFill>
-                  <a:srgbClr val="E6EDF3"/>
+                  <a:srgbClr val="1F2937"/>
                 </a:solidFill>
                 <a:latin typeface="Calibri" pitchFamily="34" charset="0"/>
                 <a:ea typeface="Calibri" pitchFamily="34" charset="-122"/>
@@ -3608,7 +3521,7 @@
             <a:r>
               <a:rPr lang="en-US" sz="1400" dirty="0">
                 <a:solidFill>
-                  <a:srgbClr val="E6EDF3"/>
+                  <a:srgbClr val="1F2937"/>
                 </a:solidFill>
                 <a:latin typeface="Calibri" pitchFamily="34" charset="0"/>
                 <a:ea typeface="Calibri" pitchFamily="34" charset="-122"/>
@@ -3629,7 +3542,7 @@
             <a:r>
               <a:rPr lang="en-US" sz="1400" dirty="0">
                 <a:solidFill>
-                  <a:srgbClr val="E6EDF3"/>
+                  <a:srgbClr val="1F2937"/>
                 </a:solidFill>
                 <a:latin typeface="Calibri" pitchFamily="34" charset="0"/>
                 <a:ea typeface="Calibri" pitchFamily="34" charset="-122"/>
@@ -3668,7 +3581,7 @@
             <a:r>
               <a:rPr lang="en-US" sz="900" dirty="0">
                 <a:solidFill>
-                  <a:srgbClr val="94A3B8"/>
+                  <a:srgbClr val="64748B"/>
                 </a:solidFill>
                 <a:latin typeface="Calibri" pitchFamily="34" charset="0"/>
                 <a:ea typeface="Calibri" pitchFamily="34" charset="-122"/>
@@ -3680,38 +3593,9 @@
           </a:p>
         </p:txBody>
       </p:sp>
-      <p:sp>
-        <p:nvSpPr>
-          <p:cNvPr id="8" name="Shape 5"/>
-          <p:cNvSpPr/>
-          <p:nvPr/>
-        </p:nvSpPr>
-        <p:spPr>
-          <a:xfrm>
-            <a:off x="7772400" y="4590288"/>
-            <a:ext cx="969264" cy="475488"/>
-          </a:xfrm>
-          <a:prstGeom prst="roundRect">
-            <a:avLst>
-              <a:gd name="adj" fmla="val 11538"/>
-            </a:avLst>
-          </a:prstGeom>
-          <a:solidFill>
-            <a:srgbClr val="FFFFFF"/>
-          </a:solidFill>
-          <a:ln/>
-          <a:effectLst>
-            <a:outerShdw sx="100000" sy="100000" kx="0" ky="0" algn="bl" rotWithShape="0" blurRad="101600" dist="38100" dir="5400000">
-              <a:srgbClr val="000000">
-                <a:alpha val="35000"/>
-              </a:srgbClr>
-            </a:outerShdw>
-          </a:effectLst>
-        </p:spPr>
-      </p:sp>
       <p:pic>
         <p:nvPicPr>
-          <p:cNvPr id="9" name="Image 1" descr="/Users/pop7/Library/CloudStorage/OneDrive-MonsterConnectCo.,Ltd/Lecture/KOSEN69 - software-security/slides/pptx/assets/logo-small.png">    </p:cNvPr>
+          <p:cNvPr id="8" name="Image 1" descr="/Users/pop7/Library/CloudStorage/OneDrive-MonsterConnectCo.,Ltd/Lecture/KOSEN69 - software-security/slides/pptx/assets/logo-small.png">    </p:cNvPr>
           <p:cNvPicPr>
             <a:picLocks noChangeAspect="1"/>
           </p:cNvPicPr>
@@ -3725,7 +3609,7 @@
         </p:blipFill>
         <p:spPr>
           <a:xfrm>
-            <a:off x="7872984" y="4681728"/>
+            <a:off x="7882128" y="4700016"/>
             <a:ext cx="768096" cy="356616"/>
           </a:xfrm>
           <a:prstGeom prst="rect">
@@ -3747,7 +3631,7 @@
     <p:bg>
       <p:bgPr>
         <a:solidFill>
-          <a:srgbClr val="0E1726"/>
+          <a:srgbClr val="FFFFFF"/>
         </a:solidFill>
       </p:bgPr>
     </p:bg>
@@ -3784,9 +3668,9 @@
           </a:solidFill>
           <a:ln/>
           <a:effectLst>
-            <a:outerShdw sx="100000" sy="100000" kx="0" ky="0" algn="bl" rotWithShape="0" blurRad="101600" dist="38100" dir="5400000">
+            <a:outerShdw sx="100000" sy="100000" kx="0" ky="0" algn="bl" rotWithShape="0" blurRad="76200" dist="25400" dir="5400000">
               <a:srgbClr val="000000">
-                <a:alpha val="35000"/>
+                <a:alpha val="12000"/>
               </a:srgbClr>
             </a:outerShdw>
           </a:effectLst>
@@ -3843,7 +3727,7 @@
             <a:r>
               <a:rPr lang="en-US" sz="2600" b="1" dirty="0">
                 <a:solidFill>
-                  <a:srgbClr val="E6EDF3"/>
+                  <a:srgbClr val="1F2937"/>
                 </a:solidFill>
                 <a:latin typeface="Arial" pitchFamily="34" charset="0"/>
                 <a:ea typeface="Arial" pitchFamily="34" charset="-122"/>
@@ -3872,13 +3756,13 @@
             </a:avLst>
           </a:prstGeom>
           <a:solidFill>
-            <a:srgbClr val="18243A"/>
+            <a:srgbClr val="F1F5F9"/>
           </a:solidFill>
           <a:ln/>
           <a:effectLst>
-            <a:outerShdw sx="100000" sy="100000" kx="0" ky="0" algn="bl" rotWithShape="0" blurRad="101600" dist="38100" dir="5400000">
+            <a:outerShdw sx="100000" sy="100000" kx="0" ky="0" algn="bl" rotWithShape="0" blurRad="76200" dist="25400" dir="5400000">
               <a:srgbClr val="000000">
-                <a:alpha val="35000"/>
+                <a:alpha val="12000"/>
               </a:srgbClr>
             </a:outerShdw>
           </a:effectLst>
@@ -3915,7 +3799,7 @@
             <a:r>
               <a:rPr lang="en-US" sz="1400" dirty="0">
                 <a:solidFill>
-                  <a:srgbClr val="E6EDF3"/>
+                  <a:srgbClr val="1F2937"/>
                 </a:solidFill>
                 <a:latin typeface="Calibri" pitchFamily="34" charset="0"/>
                 <a:ea typeface="Calibri" pitchFamily="34" charset="-122"/>
@@ -3936,7 +3820,7 @@
             <a:r>
               <a:rPr lang="en-US" sz="1400" dirty="0">
                 <a:solidFill>
-                  <a:srgbClr val="E6EDF3"/>
+                  <a:srgbClr val="1F2937"/>
                 </a:solidFill>
                 <a:latin typeface="Calibri" pitchFamily="34" charset="0"/>
                 <a:ea typeface="Calibri" pitchFamily="34" charset="-122"/>
@@ -3957,7 +3841,7 @@
             <a:r>
               <a:rPr lang="en-US" sz="1400" dirty="0">
                 <a:solidFill>
-                  <a:srgbClr val="E6EDF3"/>
+                  <a:srgbClr val="1F2937"/>
                 </a:solidFill>
                 <a:latin typeface="Calibri" pitchFamily="34" charset="0"/>
                 <a:ea typeface="Calibri" pitchFamily="34" charset="-122"/>
@@ -3978,7 +3862,7 @@
             <a:r>
               <a:rPr lang="en-US" sz="1400" dirty="0">
                 <a:solidFill>
-                  <a:srgbClr val="E6EDF3"/>
+                  <a:srgbClr val="1F2937"/>
                 </a:solidFill>
                 <a:latin typeface="Calibri" pitchFamily="34" charset="0"/>
                 <a:ea typeface="Calibri" pitchFamily="34" charset="-122"/>
@@ -3999,7 +3883,7 @@
             <a:r>
               <a:rPr lang="en-US" sz="1400" dirty="0">
                 <a:solidFill>
-                  <a:srgbClr val="E6EDF3"/>
+                  <a:srgbClr val="1F2937"/>
                 </a:solidFill>
                 <a:latin typeface="Calibri" pitchFamily="34" charset="0"/>
                 <a:ea typeface="Calibri" pitchFamily="34" charset="-122"/>
@@ -4038,7 +3922,7 @@
             <a:r>
               <a:rPr lang="en-US" sz="900" dirty="0">
                 <a:solidFill>
-                  <a:srgbClr val="94A3B8"/>
+                  <a:srgbClr val="64748B"/>
                 </a:solidFill>
                 <a:latin typeface="Calibri" pitchFamily="34" charset="0"/>
                 <a:ea typeface="Calibri" pitchFamily="34" charset="-122"/>
@@ -4050,38 +3934,9 @@
           </a:p>
         </p:txBody>
       </p:sp>
-      <p:sp>
-        <p:nvSpPr>
-          <p:cNvPr id="8" name="Shape 5"/>
-          <p:cNvSpPr/>
-          <p:nvPr/>
-        </p:nvSpPr>
-        <p:spPr>
-          <a:xfrm>
-            <a:off x="7772400" y="4590288"/>
-            <a:ext cx="969264" cy="475488"/>
-          </a:xfrm>
-          <a:prstGeom prst="roundRect">
-            <a:avLst>
-              <a:gd name="adj" fmla="val 11538"/>
-            </a:avLst>
-          </a:prstGeom>
-          <a:solidFill>
-            <a:srgbClr val="FFFFFF"/>
-          </a:solidFill>
-          <a:ln/>
-          <a:effectLst>
-            <a:outerShdw sx="100000" sy="100000" kx="0" ky="0" algn="bl" rotWithShape="0" blurRad="101600" dist="38100" dir="5400000">
-              <a:srgbClr val="000000">
-                <a:alpha val="35000"/>
-              </a:srgbClr>
-            </a:outerShdw>
-          </a:effectLst>
-        </p:spPr>
-      </p:sp>
       <p:pic>
         <p:nvPicPr>
-          <p:cNvPr id="9" name="Image 1" descr="/Users/pop7/Library/CloudStorage/OneDrive-MonsterConnectCo.,Ltd/Lecture/KOSEN69 - software-security/slides/pptx/assets/logo-small.png">    </p:cNvPr>
+          <p:cNvPr id="8" name="Image 1" descr="/Users/pop7/Library/CloudStorage/OneDrive-MonsterConnectCo.,Ltd/Lecture/KOSEN69 - software-security/slides/pptx/assets/logo-small.png">    </p:cNvPr>
           <p:cNvPicPr>
             <a:picLocks noChangeAspect="1"/>
           </p:cNvPicPr>
@@ -4095,7 +3950,7 @@
         </p:blipFill>
         <p:spPr>
           <a:xfrm>
-            <a:off x="7872984" y="4681728"/>
+            <a:off x="7882128" y="4700016"/>
             <a:ext cx="768096" cy="356616"/>
           </a:xfrm>
           <a:prstGeom prst="rect">
@@ -4117,7 +3972,7 @@
     <p:bg>
       <p:bgPr>
         <a:solidFill>
-          <a:srgbClr val="0E1726"/>
+          <a:srgbClr val="FFFFFF"/>
         </a:solidFill>
       </p:bgPr>
     </p:bg>
@@ -4154,9 +4009,9 @@
           </a:solidFill>
           <a:ln/>
           <a:effectLst>
-            <a:outerShdw sx="100000" sy="100000" kx="0" ky="0" algn="bl" rotWithShape="0" blurRad="101600" dist="38100" dir="5400000">
+            <a:outerShdw sx="100000" sy="100000" kx="0" ky="0" algn="bl" rotWithShape="0" blurRad="76200" dist="25400" dir="5400000">
               <a:srgbClr val="000000">
-                <a:alpha val="35000"/>
+                <a:alpha val="12000"/>
               </a:srgbClr>
             </a:outerShdw>
           </a:effectLst>
@@ -4213,7 +4068,7 @@
             <a:r>
               <a:rPr lang="en-US" sz="2600" b="1" dirty="0">
                 <a:solidFill>
-                  <a:srgbClr val="E6EDF3"/>
+                  <a:srgbClr val="1F2937"/>
                 </a:solidFill>
                 <a:latin typeface="Arial" pitchFamily="34" charset="0"/>
                 <a:ea typeface="Arial" pitchFamily="34" charset="-122"/>
@@ -4252,7 +4107,7 @@
             <a:r>
               <a:rPr lang="en-US" sz="1400" dirty="0">
                 <a:solidFill>
-                  <a:srgbClr val="E6EDF3"/>
+                  <a:srgbClr val="1F2937"/>
                 </a:solidFill>
                 <a:latin typeface="Calibri" pitchFamily="34" charset="0"/>
                 <a:ea typeface="Calibri" pitchFamily="34" charset="-122"/>
@@ -4350,7 +4205,7 @@
             <a:r>
               <a:rPr lang="en-US" sz="1350" dirty="0">
                 <a:solidFill>
-                  <a:srgbClr val="E6EDF3"/>
+                  <a:srgbClr val="1F2937"/>
                 </a:solidFill>
                 <a:latin typeface="Calibri" pitchFamily="34" charset="0"/>
                 <a:ea typeface="Calibri" pitchFamily="34" charset="-122"/>
@@ -4448,7 +4303,7 @@
             <a:r>
               <a:rPr lang="en-US" sz="1350" dirty="0">
                 <a:solidFill>
-                  <a:srgbClr val="E6EDF3"/>
+                  <a:srgbClr val="1F2937"/>
                 </a:solidFill>
                 <a:latin typeface="Calibri" pitchFamily="34" charset="0"/>
                 <a:ea typeface="Calibri" pitchFamily="34" charset="-122"/>
@@ -4546,7 +4401,7 @@
             <a:r>
               <a:rPr lang="en-US" sz="1350" dirty="0">
                 <a:solidFill>
-                  <a:srgbClr val="E6EDF3"/>
+                  <a:srgbClr val="1F2937"/>
                 </a:solidFill>
                 <a:latin typeface="Calibri" pitchFamily="34" charset="0"/>
                 <a:ea typeface="Calibri" pitchFamily="34" charset="-122"/>
@@ -4585,7 +4440,7 @@
             <a:r>
               <a:rPr lang="en-US" sz="900" dirty="0">
                 <a:solidFill>
-                  <a:srgbClr val="94A3B8"/>
+                  <a:srgbClr val="64748B"/>
                 </a:solidFill>
                 <a:latin typeface="Calibri" pitchFamily="34" charset="0"/>
                 <a:ea typeface="Calibri" pitchFamily="34" charset="-122"/>
@@ -4597,38 +4452,9 @@
           </a:p>
         </p:txBody>
       </p:sp>
-      <p:sp>
-        <p:nvSpPr>
-          <p:cNvPr id="16" name="Shape 13"/>
-          <p:cNvSpPr/>
-          <p:nvPr/>
-        </p:nvSpPr>
-        <p:spPr>
-          <a:xfrm>
-            <a:off x="7772400" y="4590288"/>
-            <a:ext cx="969264" cy="475488"/>
-          </a:xfrm>
-          <a:prstGeom prst="roundRect">
-            <a:avLst>
-              <a:gd name="adj" fmla="val 11538"/>
-            </a:avLst>
-          </a:prstGeom>
-          <a:solidFill>
-            <a:srgbClr val="FFFFFF"/>
-          </a:solidFill>
-          <a:ln/>
-          <a:effectLst>
-            <a:outerShdw sx="100000" sy="100000" kx="0" ky="0" algn="bl" rotWithShape="0" blurRad="101600" dist="38100" dir="5400000">
-              <a:srgbClr val="000000">
-                <a:alpha val="35000"/>
-              </a:srgbClr>
-            </a:outerShdw>
-          </a:effectLst>
-        </p:spPr>
-      </p:sp>
       <p:pic>
         <p:nvPicPr>
-          <p:cNvPr id="17" name="Image 1" descr="/Users/pop7/Library/CloudStorage/OneDrive-MonsterConnectCo.,Ltd/Lecture/KOSEN69 - software-security/slides/pptx/assets/logo-small.png">    </p:cNvPr>
+          <p:cNvPr id="16" name="Image 1" descr="/Users/pop7/Library/CloudStorage/OneDrive-MonsterConnectCo.,Ltd/Lecture/KOSEN69 - software-security/slides/pptx/assets/logo-small.png">    </p:cNvPr>
           <p:cNvPicPr>
             <a:picLocks noChangeAspect="1"/>
           </p:cNvPicPr>
@@ -4642,7 +4468,7 @@
         </p:blipFill>
         <p:spPr>
           <a:xfrm>
-            <a:off x="7872984" y="4681728"/>
+            <a:off x="7882128" y="4700016"/>
             <a:ext cx="768096" cy="356616"/>
           </a:xfrm>
           <a:prstGeom prst="rect">
@@ -4664,7 +4490,7 @@
     <p:bg>
       <p:bgPr>
         <a:solidFill>
-          <a:srgbClr val="0E1726"/>
+          <a:srgbClr val="FFFFFF"/>
         </a:solidFill>
       </p:bgPr>
     </p:bg>
@@ -4701,9 +4527,9 @@
           </a:solidFill>
           <a:ln/>
           <a:effectLst>
-            <a:outerShdw sx="100000" sy="100000" kx="0" ky="0" algn="bl" rotWithShape="0" blurRad="101600" dist="38100" dir="5400000">
+            <a:outerShdw sx="100000" sy="100000" kx="0" ky="0" algn="bl" rotWithShape="0" blurRad="76200" dist="25400" dir="5400000">
               <a:srgbClr val="000000">
-                <a:alpha val="35000"/>
+                <a:alpha val="12000"/>
               </a:srgbClr>
             </a:outerShdw>
           </a:effectLst>
@@ -4760,7 +4586,7 @@
             <a:r>
               <a:rPr lang="en-US" sz="2600" b="1" dirty="0">
                 <a:solidFill>
-                  <a:srgbClr val="E6EDF3"/>
+                  <a:srgbClr val="1F2937"/>
                 </a:solidFill>
                 <a:latin typeface="Arial" pitchFamily="34" charset="0"/>
                 <a:ea typeface="Arial" pitchFamily="34" charset="-122"/>
@@ -4793,7 +4619,7 @@
           </a:solidFill>
           <a:ln w="12700">
             <a:solidFill>
-              <a:srgbClr val="1E2B45"/>
+              <a:srgbClr val="E8EDF3"/>
             </a:solidFill>
             <a:prstDash val="solid"/>
           </a:ln>
@@ -4924,7 +4750,7 @@
             <a:r>
               <a:rPr lang="en-US" sz="1350" dirty="0">
                 <a:solidFill>
-                  <a:srgbClr val="E6EDF3"/>
+                  <a:srgbClr val="1F2937"/>
                 </a:solidFill>
                 <a:latin typeface="Calibri" pitchFamily="34" charset="0"/>
                 <a:ea typeface="Calibri" pitchFamily="34" charset="-122"/>
@@ -5022,7 +4848,7 @@
             <a:r>
               <a:rPr lang="en-US" sz="1350" dirty="0">
                 <a:solidFill>
-                  <a:srgbClr val="E6EDF3"/>
+                  <a:srgbClr val="1F2937"/>
                 </a:solidFill>
                 <a:latin typeface="Calibri" pitchFamily="34" charset="0"/>
                 <a:ea typeface="Calibri" pitchFamily="34" charset="-122"/>
@@ -5120,7 +4946,7 @@
             <a:r>
               <a:rPr lang="en-US" sz="1350" dirty="0">
                 <a:solidFill>
-                  <a:srgbClr val="E6EDF3"/>
+                  <a:srgbClr val="1F2937"/>
                 </a:solidFill>
                 <a:latin typeface="Calibri" pitchFamily="34" charset="0"/>
                 <a:ea typeface="Calibri" pitchFamily="34" charset="-122"/>
@@ -5218,7 +5044,7 @@
             <a:r>
               <a:rPr lang="en-US" sz="1350" dirty="0">
                 <a:solidFill>
-                  <a:srgbClr val="E6EDF3"/>
+                  <a:srgbClr val="1F2937"/>
                 </a:solidFill>
                 <a:latin typeface="Calibri" pitchFamily="34" charset="0"/>
                 <a:ea typeface="Calibri" pitchFamily="34" charset="-122"/>
@@ -5257,7 +5083,7 @@
             <a:r>
               <a:rPr lang="en-US" sz="900" dirty="0">
                 <a:solidFill>
-                  <a:srgbClr val="94A3B8"/>
+                  <a:srgbClr val="64748B"/>
                 </a:solidFill>
                 <a:latin typeface="Calibri" pitchFamily="34" charset="0"/>
                 <a:ea typeface="Calibri" pitchFamily="34" charset="-122"/>
@@ -5269,38 +5095,9 @@
           </a:p>
         </p:txBody>
       </p:sp>
-      <p:sp>
-        <p:nvSpPr>
-          <p:cNvPr id="20" name="Shape 17"/>
-          <p:cNvSpPr/>
-          <p:nvPr/>
-        </p:nvSpPr>
-        <p:spPr>
-          <a:xfrm>
-            <a:off x="7772400" y="4590288"/>
-            <a:ext cx="969264" cy="475488"/>
-          </a:xfrm>
-          <a:prstGeom prst="roundRect">
-            <a:avLst>
-              <a:gd name="adj" fmla="val 11538"/>
-            </a:avLst>
-          </a:prstGeom>
-          <a:solidFill>
-            <a:srgbClr val="FFFFFF"/>
-          </a:solidFill>
-          <a:ln/>
-          <a:effectLst>
-            <a:outerShdw sx="100000" sy="100000" kx="0" ky="0" algn="bl" rotWithShape="0" blurRad="101600" dist="38100" dir="5400000">
-              <a:srgbClr val="000000">
-                <a:alpha val="35000"/>
-              </a:srgbClr>
-            </a:outerShdw>
-          </a:effectLst>
-        </p:spPr>
-      </p:sp>
       <p:pic>
         <p:nvPicPr>
-          <p:cNvPr id="21" name="Image 1" descr="/Users/pop7/Library/CloudStorage/OneDrive-MonsterConnectCo.,Ltd/Lecture/KOSEN69 - software-security/slides/pptx/assets/logo-small.png">    </p:cNvPr>
+          <p:cNvPr id="20" name="Image 1" descr="/Users/pop7/Library/CloudStorage/OneDrive-MonsterConnectCo.,Ltd/Lecture/KOSEN69 - software-security/slides/pptx/assets/logo-small.png">    </p:cNvPr>
           <p:cNvPicPr>
             <a:picLocks noChangeAspect="1"/>
           </p:cNvPicPr>
@@ -5314,7 +5111,7 @@
         </p:blipFill>
         <p:spPr>
           <a:xfrm>
-            <a:off x="7872984" y="4681728"/>
+            <a:off x="7882128" y="4700016"/>
             <a:ext cx="768096" cy="356616"/>
           </a:xfrm>
           <a:prstGeom prst="rect">
@@ -5336,7 +5133,7 @@
     <p:bg>
       <p:bgPr>
         <a:solidFill>
-          <a:srgbClr val="0E1726"/>
+          <a:srgbClr val="FFFFFF"/>
         </a:solidFill>
       </p:bgPr>
     </p:bg>
@@ -5373,9 +5170,9 @@
           </a:solidFill>
           <a:ln/>
           <a:effectLst>
-            <a:outerShdw sx="100000" sy="100000" kx="0" ky="0" algn="bl" rotWithShape="0" blurRad="101600" dist="38100" dir="5400000">
+            <a:outerShdw sx="100000" sy="100000" kx="0" ky="0" algn="bl" rotWithShape="0" blurRad="76200" dist="25400" dir="5400000">
               <a:srgbClr val="000000">
-                <a:alpha val="35000"/>
+                <a:alpha val="12000"/>
               </a:srgbClr>
             </a:outerShdw>
           </a:effectLst>
@@ -5432,7 +5229,7 @@
             <a:r>
               <a:rPr lang="en-US" sz="2600" b="1" dirty="0">
                 <a:solidFill>
-                  <a:srgbClr val="E6EDF3"/>
+                  <a:srgbClr val="1F2937"/>
                 </a:solidFill>
                 <a:latin typeface="Arial" pitchFamily="34" charset="0"/>
                 <a:ea typeface="Arial" pitchFamily="34" charset="-122"/>
@@ -5461,13 +5258,13 @@
             </a:avLst>
           </a:prstGeom>
           <a:solidFill>
-            <a:srgbClr val="18243A"/>
+            <a:srgbClr val="F1F5F9"/>
           </a:solidFill>
           <a:ln/>
           <a:effectLst>
-            <a:outerShdw sx="100000" sy="100000" kx="0" ky="0" algn="bl" rotWithShape="0" blurRad="101600" dist="38100" dir="5400000">
+            <a:outerShdw sx="100000" sy="100000" kx="0" ky="0" algn="bl" rotWithShape="0" blurRad="76200" dist="25400" dir="5400000">
               <a:srgbClr val="000000">
-                <a:alpha val="35000"/>
+                <a:alpha val="12000"/>
               </a:srgbClr>
             </a:outerShdw>
           </a:effectLst>
@@ -5504,7 +5301,7 @@
             <a:r>
               <a:rPr lang="en-US" sz="1400" dirty="0">
                 <a:solidFill>
-                  <a:srgbClr val="E6EDF3"/>
+                  <a:srgbClr val="1F2937"/>
                 </a:solidFill>
                 <a:latin typeface="Calibri" pitchFamily="34" charset="0"/>
                 <a:ea typeface="Calibri" pitchFamily="34" charset="-122"/>
@@ -5525,7 +5322,7 @@
             <a:r>
               <a:rPr lang="en-US" sz="1400" dirty="0">
                 <a:solidFill>
-                  <a:srgbClr val="E6EDF3"/>
+                  <a:srgbClr val="1F2937"/>
                 </a:solidFill>
                 <a:latin typeface="Calibri" pitchFamily="34" charset="0"/>
                 <a:ea typeface="Calibri" pitchFamily="34" charset="-122"/>
@@ -5546,7 +5343,7 @@
             <a:r>
               <a:rPr lang="en-US" sz="1400" dirty="0">
                 <a:solidFill>
-                  <a:srgbClr val="E6EDF3"/>
+                  <a:srgbClr val="1F2937"/>
                 </a:solidFill>
                 <a:latin typeface="Calibri" pitchFamily="34" charset="0"/>
                 <a:ea typeface="Calibri" pitchFamily="34" charset="-122"/>
@@ -5585,7 +5382,7 @@
             <a:r>
               <a:rPr lang="en-US" sz="900" dirty="0">
                 <a:solidFill>
-                  <a:srgbClr val="94A3B8"/>
+                  <a:srgbClr val="64748B"/>
                 </a:solidFill>
                 <a:latin typeface="Calibri" pitchFamily="34" charset="0"/>
                 <a:ea typeface="Calibri" pitchFamily="34" charset="-122"/>
@@ -5597,38 +5394,9 @@
           </a:p>
         </p:txBody>
       </p:sp>
-      <p:sp>
-        <p:nvSpPr>
-          <p:cNvPr id="8" name="Shape 5"/>
-          <p:cNvSpPr/>
-          <p:nvPr/>
-        </p:nvSpPr>
-        <p:spPr>
-          <a:xfrm>
-            <a:off x="7772400" y="4590288"/>
-            <a:ext cx="969264" cy="475488"/>
-          </a:xfrm>
-          <a:prstGeom prst="roundRect">
-            <a:avLst>
-              <a:gd name="adj" fmla="val 11538"/>
-            </a:avLst>
-          </a:prstGeom>
-          <a:solidFill>
-            <a:srgbClr val="FFFFFF"/>
-          </a:solidFill>
-          <a:ln/>
-          <a:effectLst>
-            <a:outerShdw sx="100000" sy="100000" kx="0" ky="0" algn="bl" rotWithShape="0" blurRad="101600" dist="38100" dir="5400000">
-              <a:srgbClr val="000000">
-                <a:alpha val="35000"/>
-              </a:srgbClr>
-            </a:outerShdw>
-          </a:effectLst>
-        </p:spPr>
-      </p:sp>
       <p:pic>
         <p:nvPicPr>
-          <p:cNvPr id="9" name="Image 1" descr="/Users/pop7/Library/CloudStorage/OneDrive-MonsterConnectCo.,Ltd/Lecture/KOSEN69 - software-security/slides/pptx/assets/logo-small.png">    </p:cNvPr>
+          <p:cNvPr id="8" name="Image 1" descr="/Users/pop7/Library/CloudStorage/OneDrive-MonsterConnectCo.,Ltd/Lecture/KOSEN69 - software-security/slides/pptx/assets/logo-small.png">    </p:cNvPr>
           <p:cNvPicPr>
             <a:picLocks noChangeAspect="1"/>
           </p:cNvPicPr>
@@ -5642,7 +5410,7 @@
         </p:blipFill>
         <p:spPr>
           <a:xfrm>
-            <a:off x="7872984" y="4681728"/>
+            <a:off x="7882128" y="4700016"/>
             <a:ext cx="768096" cy="356616"/>
           </a:xfrm>
           <a:prstGeom prst="rect">
@@ -5664,7 +5432,7 @@
     <p:bg>
       <p:bgPr>
         <a:solidFill>
-          <a:srgbClr val="0E1726"/>
+          <a:srgbClr val="FFFFFF"/>
         </a:solidFill>
       </p:bgPr>
     </p:bg>
@@ -5701,9 +5469,9 @@
           </a:solidFill>
           <a:ln/>
           <a:effectLst>
-            <a:outerShdw sx="100000" sy="100000" kx="0" ky="0" algn="bl" rotWithShape="0" blurRad="101600" dist="38100" dir="5400000">
+            <a:outerShdw sx="100000" sy="100000" kx="0" ky="0" algn="bl" rotWithShape="0" blurRad="76200" dist="25400" dir="5400000">
               <a:srgbClr val="000000">
-                <a:alpha val="35000"/>
+                <a:alpha val="12000"/>
               </a:srgbClr>
             </a:outerShdw>
           </a:effectLst>
@@ -5760,7 +5528,7 @@
             <a:r>
               <a:rPr lang="en-US" sz="2600" b="1" dirty="0">
                 <a:solidFill>
-                  <a:srgbClr val="E6EDF3"/>
+                  <a:srgbClr val="1F2937"/>
                 </a:solidFill>
                 <a:latin typeface="Arial" pitchFamily="34" charset="0"/>
                 <a:ea typeface="Arial" pitchFamily="34" charset="-122"/>
@@ -5789,13 +5557,13 @@
             </a:avLst>
           </a:prstGeom>
           <a:solidFill>
-            <a:srgbClr val="18243A"/>
+            <a:srgbClr val="F1F5F9"/>
           </a:solidFill>
           <a:ln/>
           <a:effectLst>
-            <a:outerShdw sx="100000" sy="100000" kx="0" ky="0" algn="bl" rotWithShape="0" blurRad="101600" dist="38100" dir="5400000">
+            <a:outerShdw sx="100000" sy="100000" kx="0" ky="0" algn="bl" rotWithShape="0" blurRad="76200" dist="25400" dir="5400000">
               <a:srgbClr val="000000">
-                <a:alpha val="35000"/>
+                <a:alpha val="12000"/>
               </a:srgbClr>
             </a:outerShdw>
           </a:effectLst>
@@ -5832,7 +5600,7 @@
             <a:r>
               <a:rPr lang="en-US" sz="1400" dirty="0">
                 <a:solidFill>
-                  <a:srgbClr val="E6EDF3"/>
+                  <a:srgbClr val="1F2937"/>
                 </a:solidFill>
                 <a:latin typeface="Calibri" pitchFamily="34" charset="0"/>
                 <a:ea typeface="Calibri" pitchFamily="34" charset="-122"/>
@@ -5853,7 +5621,7 @@
             <a:r>
               <a:rPr lang="en-US" sz="1400" dirty="0">
                 <a:solidFill>
-                  <a:srgbClr val="E6EDF3"/>
+                  <a:srgbClr val="1F2937"/>
                 </a:solidFill>
                 <a:latin typeface="Calibri" pitchFamily="34" charset="0"/>
                 <a:ea typeface="Calibri" pitchFamily="34" charset="-122"/>
@@ -5874,7 +5642,7 @@
             <a:r>
               <a:rPr lang="en-US" sz="1400" dirty="0">
                 <a:solidFill>
-                  <a:srgbClr val="E6EDF3"/>
+                  <a:srgbClr val="1F2937"/>
                 </a:solidFill>
                 <a:latin typeface="Calibri" pitchFamily="34" charset="0"/>
                 <a:ea typeface="Calibri" pitchFamily="34" charset="-122"/>
@@ -5913,7 +5681,7 @@
             <a:r>
               <a:rPr lang="en-US" sz="900" dirty="0">
                 <a:solidFill>
-                  <a:srgbClr val="94A3B8"/>
+                  <a:srgbClr val="64748B"/>
                 </a:solidFill>
                 <a:latin typeface="Calibri" pitchFamily="34" charset="0"/>
                 <a:ea typeface="Calibri" pitchFamily="34" charset="-122"/>
@@ -5925,38 +5693,9 @@
           </a:p>
         </p:txBody>
       </p:sp>
-      <p:sp>
-        <p:nvSpPr>
-          <p:cNvPr id="8" name="Shape 5"/>
-          <p:cNvSpPr/>
-          <p:nvPr/>
-        </p:nvSpPr>
-        <p:spPr>
-          <a:xfrm>
-            <a:off x="7772400" y="4590288"/>
-            <a:ext cx="969264" cy="475488"/>
-          </a:xfrm>
-          <a:prstGeom prst="roundRect">
-            <a:avLst>
-              <a:gd name="adj" fmla="val 11538"/>
-            </a:avLst>
-          </a:prstGeom>
-          <a:solidFill>
-            <a:srgbClr val="FFFFFF"/>
-          </a:solidFill>
-          <a:ln/>
-          <a:effectLst>
-            <a:outerShdw sx="100000" sy="100000" kx="0" ky="0" algn="bl" rotWithShape="0" blurRad="101600" dist="38100" dir="5400000">
-              <a:srgbClr val="000000">
-                <a:alpha val="35000"/>
-              </a:srgbClr>
-            </a:outerShdw>
-          </a:effectLst>
-        </p:spPr>
-      </p:sp>
       <p:pic>
         <p:nvPicPr>
-          <p:cNvPr id="9" name="Image 1" descr="/Users/pop7/Library/CloudStorage/OneDrive-MonsterConnectCo.,Ltd/Lecture/KOSEN69 - software-security/slides/pptx/assets/logo-small.png">    </p:cNvPr>
+          <p:cNvPr id="8" name="Image 1" descr="/Users/pop7/Library/CloudStorage/OneDrive-MonsterConnectCo.,Ltd/Lecture/KOSEN69 - software-security/slides/pptx/assets/logo-small.png">    </p:cNvPr>
           <p:cNvPicPr>
             <a:picLocks noChangeAspect="1"/>
           </p:cNvPicPr>
@@ -5970,7 +5709,7 @@
         </p:blipFill>
         <p:spPr>
           <a:xfrm>
-            <a:off x="7872984" y="4681728"/>
+            <a:off x="7882128" y="4700016"/>
             <a:ext cx="768096" cy="356616"/>
           </a:xfrm>
           <a:prstGeom prst="rect">
@@ -5992,7 +5731,7 @@
     <p:bg>
       <p:bgPr>
         <a:solidFill>
-          <a:srgbClr val="0E1726"/>
+          <a:srgbClr val="FFFFFF"/>
         </a:solidFill>
       </p:bgPr>
     </p:bg>
@@ -6037,7 +5776,7 @@
             <a:r>
               <a:rPr lang="en-US" sz="4600" b="1" dirty="0">
                 <a:solidFill>
-                  <a:srgbClr val="E6EDF3"/>
+                  <a:srgbClr val="1F2937"/>
                 </a:solidFill>
                 <a:latin typeface="Arial" pitchFamily="34" charset="0"/>
                 <a:ea typeface="Arial" pitchFamily="34" charset="-122"/>
@@ -6088,38 +5827,9 @@
           </a:p>
         </p:txBody>
       </p:sp>
-      <p:sp>
-        <p:nvSpPr>
-          <p:cNvPr id="4" name="Shape 2"/>
-          <p:cNvSpPr/>
-          <p:nvPr/>
-        </p:nvSpPr>
-        <p:spPr>
-          <a:xfrm>
-            <a:off x="7772400" y="4590288"/>
-            <a:ext cx="969264" cy="475488"/>
-          </a:xfrm>
-          <a:prstGeom prst="roundRect">
-            <a:avLst>
-              <a:gd name="adj" fmla="val 11538"/>
-            </a:avLst>
-          </a:prstGeom>
-          <a:solidFill>
-            <a:srgbClr val="FFFFFF"/>
-          </a:solidFill>
-          <a:ln/>
-          <a:effectLst>
-            <a:outerShdw sx="100000" sy="100000" kx="0" ky="0" algn="bl" rotWithShape="0" blurRad="101600" dist="38100" dir="5400000">
-              <a:srgbClr val="000000">
-                <a:alpha val="35000"/>
-              </a:srgbClr>
-            </a:outerShdw>
-          </a:effectLst>
-        </p:spPr>
-      </p:sp>
       <p:pic>
         <p:nvPicPr>
-          <p:cNvPr id="5" name="Image 0" descr="/Users/pop7/Library/CloudStorage/OneDrive-MonsterConnectCo.,Ltd/Lecture/KOSEN69 - software-security/slides/pptx/assets/logo-small.png">    </p:cNvPr>
+          <p:cNvPr id="4" name="Image 0" descr="/Users/pop7/Library/CloudStorage/OneDrive-MonsterConnectCo.,Ltd/Lecture/KOSEN69 - software-security/slides/pptx/assets/logo-small.png">    </p:cNvPr>
           <p:cNvPicPr>
             <a:picLocks noChangeAspect="1"/>
           </p:cNvPicPr>
@@ -6133,7 +5843,7 @@
         </p:blipFill>
         <p:spPr>
           <a:xfrm>
-            <a:off x="7872984" y="4681728"/>
+            <a:off x="7882128" y="4700016"/>
             <a:ext cx="768096" cy="356616"/>
           </a:xfrm>
           <a:prstGeom prst="rect">
@@ -6155,7 +5865,7 @@
     <p:bg>
       <p:bgPr>
         <a:solidFill>
-          <a:srgbClr val="0E1726"/>
+          <a:srgbClr val="FFFFFF"/>
         </a:solidFill>
       </p:bgPr>
     </p:bg>
@@ -6192,9 +5902,9 @@
           </a:solidFill>
           <a:ln/>
           <a:effectLst>
-            <a:outerShdw sx="100000" sy="100000" kx="0" ky="0" algn="bl" rotWithShape="0" blurRad="101600" dist="38100" dir="5400000">
+            <a:outerShdw sx="100000" sy="100000" kx="0" ky="0" algn="bl" rotWithShape="0" blurRad="76200" dist="25400" dir="5400000">
               <a:srgbClr val="000000">
-                <a:alpha val="35000"/>
+                <a:alpha val="12000"/>
               </a:srgbClr>
             </a:outerShdw>
           </a:effectLst>
@@ -6251,7 +5961,7 @@
             <a:r>
               <a:rPr lang="en-US" sz="2600" b="1" dirty="0">
                 <a:solidFill>
-                  <a:srgbClr val="E6EDF3"/>
+                  <a:srgbClr val="1F2937"/>
                 </a:solidFill>
                 <a:latin typeface="Arial" pitchFamily="34" charset="0"/>
                 <a:ea typeface="Arial" pitchFamily="34" charset="-122"/>
@@ -6280,13 +5990,13 @@
             </a:avLst>
           </a:prstGeom>
           <a:solidFill>
-            <a:srgbClr val="18243A"/>
+            <a:srgbClr val="F1F5F9"/>
           </a:solidFill>
           <a:ln/>
           <a:effectLst>
-            <a:outerShdw sx="100000" sy="100000" kx="0" ky="0" algn="bl" rotWithShape="0" blurRad="101600" dist="38100" dir="5400000">
+            <a:outerShdw sx="100000" sy="100000" kx="0" ky="0" algn="bl" rotWithShape="0" blurRad="76200" dist="25400" dir="5400000">
               <a:srgbClr val="000000">
-                <a:alpha val="35000"/>
+                <a:alpha val="12000"/>
               </a:srgbClr>
             </a:outerShdw>
           </a:effectLst>
@@ -6323,7 +6033,7 @@
             <a:r>
               <a:rPr lang="en-US" sz="1400" dirty="0">
                 <a:solidFill>
-                  <a:srgbClr val="E6EDF3"/>
+                  <a:srgbClr val="1F2937"/>
                 </a:solidFill>
                 <a:latin typeface="Calibri" pitchFamily="34" charset="0"/>
                 <a:ea typeface="Calibri" pitchFamily="34" charset="-122"/>
@@ -6344,7 +6054,7 @@
             <a:r>
               <a:rPr lang="en-US" sz="1400" dirty="0">
                 <a:solidFill>
-                  <a:srgbClr val="E6EDF3"/>
+                  <a:srgbClr val="1F2937"/>
                 </a:solidFill>
                 <a:latin typeface="Calibri" pitchFamily="34" charset="0"/>
                 <a:ea typeface="Calibri" pitchFamily="34" charset="-122"/>
@@ -6365,7 +6075,7 @@
             <a:r>
               <a:rPr lang="en-US" sz="1400" dirty="0">
                 <a:solidFill>
-                  <a:srgbClr val="E6EDF3"/>
+                  <a:srgbClr val="1F2937"/>
                 </a:solidFill>
                 <a:latin typeface="Calibri" pitchFamily="34" charset="0"/>
                 <a:ea typeface="Calibri" pitchFamily="34" charset="-122"/>
@@ -6386,7 +6096,7 @@
             <a:r>
               <a:rPr lang="en-US" sz="1400" dirty="0">
                 <a:solidFill>
-                  <a:srgbClr val="E6EDF3"/>
+                  <a:srgbClr val="1F2937"/>
                 </a:solidFill>
                 <a:latin typeface="Calibri" pitchFamily="34" charset="0"/>
                 <a:ea typeface="Calibri" pitchFamily="34" charset="-122"/>
@@ -6407,7 +6117,7 @@
             <a:r>
               <a:rPr lang="en-US" sz="1400" dirty="0">
                 <a:solidFill>
-                  <a:srgbClr val="E6EDF3"/>
+                  <a:srgbClr val="1F2937"/>
                 </a:solidFill>
                 <a:latin typeface="Calibri" pitchFamily="34" charset="0"/>
                 <a:ea typeface="Calibri" pitchFamily="34" charset="-122"/>
@@ -6428,7 +6138,7 @@
             <a:r>
               <a:rPr lang="en-US" sz="1400" dirty="0">
                 <a:solidFill>
-                  <a:srgbClr val="E6EDF3"/>
+                  <a:srgbClr val="1F2937"/>
                 </a:solidFill>
                 <a:latin typeface="Calibri" pitchFamily="34" charset="0"/>
                 <a:ea typeface="Calibri" pitchFamily="34" charset="-122"/>
@@ -6467,7 +6177,7 @@
             <a:r>
               <a:rPr lang="en-US" sz="900" dirty="0">
                 <a:solidFill>
-                  <a:srgbClr val="94A3B8"/>
+                  <a:srgbClr val="64748B"/>
                 </a:solidFill>
                 <a:latin typeface="Calibri" pitchFamily="34" charset="0"/>
                 <a:ea typeface="Calibri" pitchFamily="34" charset="-122"/>
@@ -6479,38 +6189,9 @@
           </a:p>
         </p:txBody>
       </p:sp>
-      <p:sp>
-        <p:nvSpPr>
-          <p:cNvPr id="8" name="Shape 5"/>
-          <p:cNvSpPr/>
-          <p:nvPr/>
-        </p:nvSpPr>
-        <p:spPr>
-          <a:xfrm>
-            <a:off x="7772400" y="4590288"/>
-            <a:ext cx="969264" cy="475488"/>
-          </a:xfrm>
-          <a:prstGeom prst="roundRect">
-            <a:avLst>
-              <a:gd name="adj" fmla="val 11538"/>
-            </a:avLst>
-          </a:prstGeom>
-          <a:solidFill>
-            <a:srgbClr val="FFFFFF"/>
-          </a:solidFill>
-          <a:ln/>
-          <a:effectLst>
-            <a:outerShdw sx="100000" sy="100000" kx="0" ky="0" algn="bl" rotWithShape="0" blurRad="101600" dist="38100" dir="5400000">
-              <a:srgbClr val="000000">
-                <a:alpha val="35000"/>
-              </a:srgbClr>
-            </a:outerShdw>
-          </a:effectLst>
-        </p:spPr>
-      </p:sp>
       <p:pic>
         <p:nvPicPr>
-          <p:cNvPr id="9" name="Image 1" descr="/Users/pop7/Library/CloudStorage/OneDrive-MonsterConnectCo.,Ltd/Lecture/KOSEN69 - software-security/slides/pptx/assets/logo-small.png">    </p:cNvPr>
+          <p:cNvPr id="8" name="Image 1" descr="/Users/pop7/Library/CloudStorage/OneDrive-MonsterConnectCo.,Ltd/Lecture/KOSEN69 - software-security/slides/pptx/assets/logo-small.png">    </p:cNvPr>
           <p:cNvPicPr>
             <a:picLocks noChangeAspect="1"/>
           </p:cNvPicPr>
@@ -6524,7 +6205,7 @@
         </p:blipFill>
         <p:spPr>
           <a:xfrm>
-            <a:off x="7872984" y="4681728"/>
+            <a:off x="7882128" y="4700016"/>
             <a:ext cx="768096" cy="356616"/>
           </a:xfrm>
           <a:prstGeom prst="rect">
@@ -6546,7 +6227,7 @@
     <p:bg>
       <p:bgPr>
         <a:solidFill>
-          <a:srgbClr val="0E1726"/>
+          <a:srgbClr val="FFFFFF"/>
         </a:solidFill>
       </p:bgPr>
     </p:bg>
@@ -6583,9 +6264,9 @@
           </a:solidFill>
           <a:ln/>
           <a:effectLst>
-            <a:outerShdw sx="100000" sy="100000" kx="0" ky="0" algn="bl" rotWithShape="0" blurRad="101600" dist="38100" dir="5400000">
+            <a:outerShdw sx="100000" sy="100000" kx="0" ky="0" algn="bl" rotWithShape="0" blurRad="76200" dist="25400" dir="5400000">
               <a:srgbClr val="000000">
-                <a:alpha val="35000"/>
+                <a:alpha val="12000"/>
               </a:srgbClr>
             </a:outerShdw>
           </a:effectLst>
@@ -6642,7 +6323,7 @@
             <a:r>
               <a:rPr lang="en-US" sz="2600" b="1" dirty="0">
                 <a:solidFill>
-                  <a:srgbClr val="E6EDF3"/>
+                  <a:srgbClr val="1F2937"/>
                 </a:solidFill>
                 <a:latin typeface="Arial" pitchFamily="34" charset="0"/>
                 <a:ea typeface="Arial" pitchFamily="34" charset="-122"/>
@@ -6671,13 +6352,13 @@
             </a:avLst>
           </a:prstGeom>
           <a:solidFill>
-            <a:srgbClr val="18243A"/>
+            <a:srgbClr val="F1F5F9"/>
           </a:solidFill>
           <a:ln/>
           <a:effectLst>
-            <a:outerShdw sx="100000" sy="100000" kx="0" ky="0" algn="bl" rotWithShape="0" blurRad="101600" dist="38100" dir="5400000">
+            <a:outerShdw sx="100000" sy="100000" kx="0" ky="0" algn="bl" rotWithShape="0" blurRad="76200" dist="25400" dir="5400000">
               <a:srgbClr val="000000">
-                <a:alpha val="35000"/>
+                <a:alpha val="12000"/>
               </a:srgbClr>
             </a:outerShdw>
           </a:effectLst>
@@ -6714,7 +6395,7 @@
             <a:r>
               <a:rPr lang="en-US" sz="1400" dirty="0">
                 <a:solidFill>
-                  <a:srgbClr val="E6EDF3"/>
+                  <a:srgbClr val="1F2937"/>
                 </a:solidFill>
                 <a:latin typeface="Calibri" pitchFamily="34" charset="0"/>
                 <a:ea typeface="Calibri" pitchFamily="34" charset="-122"/>
@@ -6735,7 +6416,7 @@
             <a:r>
               <a:rPr lang="en-US" sz="1400" dirty="0">
                 <a:solidFill>
-                  <a:srgbClr val="E6EDF3"/>
+                  <a:srgbClr val="1F2937"/>
                 </a:solidFill>
                 <a:latin typeface="Calibri" pitchFamily="34" charset="0"/>
                 <a:ea typeface="Calibri" pitchFamily="34" charset="-122"/>
@@ -6756,7 +6437,7 @@
             <a:r>
               <a:rPr lang="en-US" sz="1400" dirty="0">
                 <a:solidFill>
-                  <a:srgbClr val="E6EDF3"/>
+                  <a:srgbClr val="1F2937"/>
                 </a:solidFill>
                 <a:latin typeface="Calibri" pitchFamily="34" charset="0"/>
                 <a:ea typeface="Calibri" pitchFamily="34" charset="-122"/>
@@ -6795,7 +6476,7 @@
             <a:r>
               <a:rPr lang="en-US" sz="900" dirty="0">
                 <a:solidFill>
-                  <a:srgbClr val="94A3B8"/>
+                  <a:srgbClr val="64748B"/>
                 </a:solidFill>
                 <a:latin typeface="Calibri" pitchFamily="34" charset="0"/>
                 <a:ea typeface="Calibri" pitchFamily="34" charset="-122"/>
@@ -6807,38 +6488,9 @@
           </a:p>
         </p:txBody>
       </p:sp>
-      <p:sp>
-        <p:nvSpPr>
-          <p:cNvPr id="8" name="Shape 5"/>
-          <p:cNvSpPr/>
-          <p:nvPr/>
-        </p:nvSpPr>
-        <p:spPr>
-          <a:xfrm>
-            <a:off x="7772400" y="4590288"/>
-            <a:ext cx="969264" cy="475488"/>
-          </a:xfrm>
-          <a:prstGeom prst="roundRect">
-            <a:avLst>
-              <a:gd name="adj" fmla="val 11538"/>
-            </a:avLst>
-          </a:prstGeom>
-          <a:solidFill>
-            <a:srgbClr val="FFFFFF"/>
-          </a:solidFill>
-          <a:ln/>
-          <a:effectLst>
-            <a:outerShdw sx="100000" sy="100000" kx="0" ky="0" algn="bl" rotWithShape="0" blurRad="101600" dist="38100" dir="5400000">
-              <a:srgbClr val="000000">
-                <a:alpha val="35000"/>
-              </a:srgbClr>
-            </a:outerShdw>
-          </a:effectLst>
-        </p:spPr>
-      </p:sp>
       <p:pic>
         <p:nvPicPr>
-          <p:cNvPr id="9" name="Image 1" descr="/Users/pop7/Library/CloudStorage/OneDrive-MonsterConnectCo.,Ltd/Lecture/KOSEN69 - software-security/slides/pptx/assets/logo-small.png">    </p:cNvPr>
+          <p:cNvPr id="8" name="Image 1" descr="/Users/pop7/Library/CloudStorage/OneDrive-MonsterConnectCo.,Ltd/Lecture/KOSEN69 - software-security/slides/pptx/assets/logo-small.png">    </p:cNvPr>
           <p:cNvPicPr>
             <a:picLocks noChangeAspect="1"/>
           </p:cNvPicPr>
@@ -6852,7 +6504,7 @@
         </p:blipFill>
         <p:spPr>
           <a:xfrm>
-            <a:off x="7872984" y="4681728"/>
+            <a:off x="7882128" y="4700016"/>
             <a:ext cx="768096" cy="356616"/>
           </a:xfrm>
           <a:prstGeom prst="rect">
@@ -6874,7 +6526,7 @@
     <p:bg>
       <p:bgPr>
         <a:solidFill>
-          <a:srgbClr val="0E1726"/>
+          <a:srgbClr val="FFFFFF"/>
         </a:solidFill>
       </p:bgPr>
     </p:bg>
@@ -6911,9 +6563,9 @@
           </a:solidFill>
           <a:ln/>
           <a:effectLst>
-            <a:outerShdw sx="100000" sy="100000" kx="0" ky="0" algn="bl" rotWithShape="0" blurRad="101600" dist="38100" dir="5400000">
+            <a:outerShdw sx="100000" sy="100000" kx="0" ky="0" algn="bl" rotWithShape="0" blurRad="76200" dist="25400" dir="5400000">
               <a:srgbClr val="000000">
-                <a:alpha val="35000"/>
+                <a:alpha val="12000"/>
               </a:srgbClr>
             </a:outerShdw>
           </a:effectLst>
@@ -6970,7 +6622,7 @@
             <a:r>
               <a:rPr lang="en-US" sz="2600" b="1" dirty="0">
                 <a:solidFill>
-                  <a:srgbClr val="E6EDF3"/>
+                  <a:srgbClr val="1F2937"/>
                 </a:solidFill>
                 <a:latin typeface="Arial" pitchFamily="34" charset="0"/>
                 <a:ea typeface="Arial" pitchFamily="34" charset="-122"/>
@@ -6999,7 +6651,7 @@
             </a:avLst>
           </a:prstGeom>
           <a:solidFill>
-            <a:srgbClr val="1E2B45"/>
+            <a:srgbClr val="E8EDF3"/>
           </a:solidFill>
           <a:ln/>
         </p:spPr>
@@ -7060,13 +6712,13 @@
             </a:avLst>
           </a:prstGeom>
           <a:solidFill>
-            <a:srgbClr val="18243A"/>
+            <a:srgbClr val="F1F5F9"/>
           </a:solidFill>
           <a:ln/>
           <a:effectLst>
-            <a:outerShdw sx="100000" sy="100000" kx="0" ky="0" algn="bl" rotWithShape="0" blurRad="101600" dist="38100" dir="5400000">
+            <a:outerShdw sx="100000" sy="100000" kx="0" ky="0" algn="bl" rotWithShape="0" blurRad="76200" dist="25400" dir="5400000">
               <a:srgbClr val="000000">
-                <a:alpha val="35000"/>
+                <a:alpha val="12000"/>
               </a:srgbClr>
             </a:outerShdw>
           </a:effectLst>
@@ -7103,7 +6755,7 @@
             <a:r>
               <a:rPr lang="en-US" sz="1400" dirty="0">
                 <a:solidFill>
-                  <a:srgbClr val="E6EDF3"/>
+                  <a:srgbClr val="1F2937"/>
                 </a:solidFill>
                 <a:latin typeface="Calibri" pitchFamily="34" charset="0"/>
                 <a:ea typeface="Calibri" pitchFamily="34" charset="-122"/>
@@ -7124,7 +6776,7 @@
             <a:r>
               <a:rPr lang="en-US" sz="1400" dirty="0">
                 <a:solidFill>
-                  <a:srgbClr val="E6EDF3"/>
+                  <a:srgbClr val="1F2937"/>
                 </a:solidFill>
                 <a:latin typeface="Calibri" pitchFamily="34" charset="0"/>
                 <a:ea typeface="Calibri" pitchFamily="34" charset="-122"/>
@@ -7145,7 +6797,7 @@
             <a:r>
               <a:rPr lang="en-US" sz="1400" dirty="0">
                 <a:solidFill>
-                  <a:srgbClr val="E6EDF3"/>
+                  <a:srgbClr val="1F2937"/>
                 </a:solidFill>
                 <a:latin typeface="Calibri" pitchFamily="34" charset="0"/>
                 <a:ea typeface="Calibri" pitchFamily="34" charset="-122"/>
@@ -7184,7 +6836,7 @@
             <a:r>
               <a:rPr lang="en-US" sz="900" dirty="0">
                 <a:solidFill>
-                  <a:srgbClr val="94A3B8"/>
+                  <a:srgbClr val="64748B"/>
                 </a:solidFill>
                 <a:latin typeface="Calibri" pitchFamily="34" charset="0"/>
                 <a:ea typeface="Calibri" pitchFamily="34" charset="-122"/>
@@ -7196,38 +6848,9 @@
           </a:p>
         </p:txBody>
       </p:sp>
-      <p:sp>
-        <p:nvSpPr>
-          <p:cNvPr id="10" name="Shape 7"/>
-          <p:cNvSpPr/>
-          <p:nvPr/>
-        </p:nvSpPr>
-        <p:spPr>
-          <a:xfrm>
-            <a:off x="7772400" y="4590288"/>
-            <a:ext cx="969264" cy="475488"/>
-          </a:xfrm>
-          <a:prstGeom prst="roundRect">
-            <a:avLst>
-              <a:gd name="adj" fmla="val 11538"/>
-            </a:avLst>
-          </a:prstGeom>
-          <a:solidFill>
-            <a:srgbClr val="FFFFFF"/>
-          </a:solidFill>
-          <a:ln/>
-          <a:effectLst>
-            <a:outerShdw sx="100000" sy="100000" kx="0" ky="0" algn="bl" rotWithShape="0" blurRad="101600" dist="38100" dir="5400000">
-              <a:srgbClr val="000000">
-                <a:alpha val="35000"/>
-              </a:srgbClr>
-            </a:outerShdw>
-          </a:effectLst>
-        </p:spPr>
-      </p:sp>
       <p:pic>
         <p:nvPicPr>
-          <p:cNvPr id="11" name="Image 1" descr="/Users/pop7/Library/CloudStorage/OneDrive-MonsterConnectCo.,Ltd/Lecture/KOSEN69 - software-security/slides/pptx/assets/logo-small.png">    </p:cNvPr>
+          <p:cNvPr id="10" name="Image 1" descr="/Users/pop7/Library/CloudStorage/OneDrive-MonsterConnectCo.,Ltd/Lecture/KOSEN69 - software-security/slides/pptx/assets/logo-small.png">    </p:cNvPr>
           <p:cNvPicPr>
             <a:picLocks noChangeAspect="1"/>
           </p:cNvPicPr>
@@ -7241,7 +6864,7 @@
         </p:blipFill>
         <p:spPr>
           <a:xfrm>
-            <a:off x="7872984" y="4681728"/>
+            <a:off x="7882128" y="4700016"/>
             <a:ext cx="768096" cy="356616"/>
           </a:xfrm>
           <a:prstGeom prst="rect">
@@ -7263,7 +6886,7 @@
     <p:bg>
       <p:bgPr>
         <a:solidFill>
-          <a:srgbClr val="0E1726"/>
+          <a:srgbClr val="FFFFFF"/>
         </a:solidFill>
       </p:bgPr>
     </p:bg>
@@ -7300,9 +6923,9 @@
           </a:solidFill>
           <a:ln/>
           <a:effectLst>
-            <a:outerShdw sx="100000" sy="100000" kx="0" ky="0" algn="bl" rotWithShape="0" blurRad="101600" dist="38100" dir="5400000">
+            <a:outerShdw sx="100000" sy="100000" kx="0" ky="0" algn="bl" rotWithShape="0" blurRad="76200" dist="25400" dir="5400000">
               <a:srgbClr val="000000">
-                <a:alpha val="35000"/>
+                <a:alpha val="12000"/>
               </a:srgbClr>
             </a:outerShdw>
           </a:effectLst>
@@ -7359,7 +6982,7 @@
             <a:r>
               <a:rPr lang="en-US" sz="2600" b="1" dirty="0">
                 <a:solidFill>
-                  <a:srgbClr val="E6EDF3"/>
+                  <a:srgbClr val="1F2937"/>
                 </a:solidFill>
                 <a:latin typeface="Arial" pitchFamily="34" charset="0"/>
                 <a:ea typeface="Arial" pitchFamily="34" charset="-122"/>
@@ -7392,7 +7015,7 @@
           </a:solidFill>
           <a:ln w="12700">
             <a:solidFill>
-              <a:srgbClr val="1E2B45"/>
+              <a:srgbClr val="E8EDF3"/>
             </a:solidFill>
             <a:prstDash val="solid"/>
           </a:ln>
@@ -7471,13 +7094,13 @@
             </a:avLst>
           </a:prstGeom>
           <a:solidFill>
-            <a:srgbClr val="18243A"/>
+            <a:srgbClr val="F1F5F9"/>
           </a:solidFill>
           <a:ln/>
           <a:effectLst>
-            <a:outerShdw sx="100000" sy="100000" kx="0" ky="0" algn="bl" rotWithShape="0" blurRad="101600" dist="38100" dir="5400000">
+            <a:outerShdw sx="100000" sy="100000" kx="0" ky="0" algn="bl" rotWithShape="0" blurRad="76200" dist="25400" dir="5400000">
               <a:srgbClr val="000000">
-                <a:alpha val="35000"/>
+                <a:alpha val="12000"/>
               </a:srgbClr>
             </a:outerShdw>
           </a:effectLst>
@@ -7514,7 +7137,7 @@
             <a:r>
               <a:rPr lang="en-US" sz="1400" dirty="0">
                 <a:solidFill>
-                  <a:srgbClr val="E6EDF3"/>
+                  <a:srgbClr val="1F2937"/>
                 </a:solidFill>
                 <a:latin typeface="Calibri" pitchFamily="34" charset="0"/>
                 <a:ea typeface="Calibri" pitchFamily="34" charset="-122"/>
@@ -7535,7 +7158,7 @@
             <a:r>
               <a:rPr lang="en-US" sz="1400" dirty="0">
                 <a:solidFill>
-                  <a:srgbClr val="E6EDF3"/>
+                  <a:srgbClr val="1F2937"/>
                 </a:solidFill>
                 <a:latin typeface="Calibri" pitchFamily="34" charset="0"/>
                 <a:ea typeface="Calibri" pitchFamily="34" charset="-122"/>
@@ -7556,7 +7179,7 @@
             <a:r>
               <a:rPr lang="en-US" sz="1400" dirty="0">
                 <a:solidFill>
-                  <a:srgbClr val="E6EDF3"/>
+                  <a:srgbClr val="1F2937"/>
                 </a:solidFill>
                 <a:latin typeface="Calibri" pitchFamily="34" charset="0"/>
                 <a:ea typeface="Calibri" pitchFamily="34" charset="-122"/>
@@ -7595,7 +7218,7 @@
             <a:r>
               <a:rPr lang="en-US" sz="900" dirty="0">
                 <a:solidFill>
-                  <a:srgbClr val="94A3B8"/>
+                  <a:srgbClr val="64748B"/>
                 </a:solidFill>
                 <a:latin typeface="Calibri" pitchFamily="34" charset="0"/>
                 <a:ea typeface="Calibri" pitchFamily="34" charset="-122"/>
@@ -7607,38 +7230,9 @@
           </a:p>
         </p:txBody>
       </p:sp>
-      <p:sp>
-        <p:nvSpPr>
-          <p:cNvPr id="10" name="Shape 7"/>
-          <p:cNvSpPr/>
-          <p:nvPr/>
-        </p:nvSpPr>
-        <p:spPr>
-          <a:xfrm>
-            <a:off x="7772400" y="4590288"/>
-            <a:ext cx="969264" cy="475488"/>
-          </a:xfrm>
-          <a:prstGeom prst="roundRect">
-            <a:avLst>
-              <a:gd name="adj" fmla="val 11538"/>
-            </a:avLst>
-          </a:prstGeom>
-          <a:solidFill>
-            <a:srgbClr val="FFFFFF"/>
-          </a:solidFill>
-          <a:ln/>
-          <a:effectLst>
-            <a:outerShdw sx="100000" sy="100000" kx="0" ky="0" algn="bl" rotWithShape="0" blurRad="101600" dist="38100" dir="5400000">
-              <a:srgbClr val="000000">
-                <a:alpha val="35000"/>
-              </a:srgbClr>
-            </a:outerShdw>
-          </a:effectLst>
-        </p:spPr>
-      </p:sp>
       <p:pic>
         <p:nvPicPr>
-          <p:cNvPr id="11" name="Image 1" descr="/Users/pop7/Library/CloudStorage/OneDrive-MonsterConnectCo.,Ltd/Lecture/KOSEN69 - software-security/slides/pptx/assets/logo-small.png">    </p:cNvPr>
+          <p:cNvPr id="10" name="Image 1" descr="/Users/pop7/Library/CloudStorage/OneDrive-MonsterConnectCo.,Ltd/Lecture/KOSEN69 - software-security/slides/pptx/assets/logo-small.png">    </p:cNvPr>
           <p:cNvPicPr>
             <a:picLocks noChangeAspect="1"/>
           </p:cNvPicPr>
@@ -7652,7 +7246,7 @@
         </p:blipFill>
         <p:spPr>
           <a:xfrm>
-            <a:off x="7872984" y="4681728"/>
+            <a:off x="7882128" y="4700016"/>
             <a:ext cx="768096" cy="356616"/>
           </a:xfrm>
           <a:prstGeom prst="rect">
@@ -7674,7 +7268,7 @@
     <p:bg>
       <p:bgPr>
         <a:solidFill>
-          <a:srgbClr val="0E1726"/>
+          <a:srgbClr val="FFFFFF"/>
         </a:solidFill>
       </p:bgPr>
     </p:bg>
@@ -7711,9 +7305,9 @@
           </a:solidFill>
           <a:ln/>
           <a:effectLst>
-            <a:outerShdw sx="100000" sy="100000" kx="0" ky="0" algn="bl" rotWithShape="0" blurRad="101600" dist="38100" dir="5400000">
+            <a:outerShdw sx="100000" sy="100000" kx="0" ky="0" algn="bl" rotWithShape="0" blurRad="76200" dist="25400" dir="5400000">
               <a:srgbClr val="000000">
-                <a:alpha val="35000"/>
+                <a:alpha val="12000"/>
               </a:srgbClr>
             </a:outerShdw>
           </a:effectLst>
@@ -7770,7 +7364,7 @@
             <a:r>
               <a:rPr lang="en-US" sz="2600" b="1" dirty="0">
                 <a:solidFill>
-                  <a:srgbClr val="E6EDF3"/>
+                  <a:srgbClr val="1F2937"/>
                 </a:solidFill>
                 <a:latin typeface="Arial" pitchFamily="34" charset="0"/>
                 <a:ea typeface="Arial" pitchFamily="34" charset="-122"/>
@@ -7809,7 +7403,7 @@
             <a:r>
               <a:rPr lang="en-US" sz="1400" dirty="0">
                 <a:solidFill>
-                  <a:srgbClr val="E6EDF3"/>
+                  <a:srgbClr val="1F2937"/>
                 </a:solidFill>
                 <a:latin typeface="Calibri" pitchFamily="34" charset="0"/>
                 <a:ea typeface="Calibri" pitchFamily="34" charset="-122"/>
@@ -7842,7 +7436,7 @@
           </a:solidFill>
           <a:ln w="12700">
             <a:solidFill>
-              <a:srgbClr val="1E2B45"/>
+              <a:srgbClr val="E8EDF3"/>
             </a:solidFill>
             <a:prstDash val="solid"/>
           </a:ln>
@@ -7908,7 +7502,7 @@
           </a:solidFill>
           <a:ln w="12700">
             <a:solidFill>
-              <a:srgbClr val="1E2B45"/>
+              <a:srgbClr val="E8EDF3"/>
             </a:solidFill>
             <a:prstDash val="solid"/>
           </a:ln>
@@ -7970,13 +7564,13 @@
             </a:avLst>
           </a:prstGeom>
           <a:solidFill>
-            <a:srgbClr val="18243A"/>
+            <a:srgbClr val="F1F5F9"/>
           </a:solidFill>
           <a:ln/>
           <a:effectLst>
-            <a:outerShdw sx="100000" sy="100000" kx="0" ky="0" algn="bl" rotWithShape="0" blurRad="101600" dist="38100" dir="5400000">
+            <a:outerShdw sx="100000" sy="100000" kx="0" ky="0" algn="bl" rotWithShape="0" blurRad="76200" dist="25400" dir="5400000">
               <a:srgbClr val="000000">
-                <a:alpha val="35000"/>
+                <a:alpha val="12000"/>
               </a:srgbClr>
             </a:outerShdw>
           </a:effectLst>
@@ -8013,7 +7607,7 @@
             <a:r>
               <a:rPr lang="en-US" sz="1400" dirty="0">
                 <a:solidFill>
-                  <a:srgbClr val="E6EDF3"/>
+                  <a:srgbClr val="1F2937"/>
                 </a:solidFill>
                 <a:latin typeface="Calibri" pitchFamily="34" charset="0"/>
                 <a:ea typeface="Calibri" pitchFamily="34" charset="-122"/>
@@ -8034,7 +7628,7 @@
             <a:r>
               <a:rPr lang="en-US" sz="1400" dirty="0">
                 <a:solidFill>
-                  <a:srgbClr val="E6EDF3"/>
+                  <a:srgbClr val="1F2937"/>
                 </a:solidFill>
                 <a:latin typeface="Calibri" pitchFamily="34" charset="0"/>
                 <a:ea typeface="Calibri" pitchFamily="34" charset="-122"/>
@@ -8055,7 +7649,7 @@
             <a:r>
               <a:rPr lang="en-US" sz="1400" dirty="0">
                 <a:solidFill>
-                  <a:srgbClr val="E6EDF3"/>
+                  <a:srgbClr val="1F2937"/>
                 </a:solidFill>
                 <a:latin typeface="Calibri" pitchFamily="34" charset="0"/>
                 <a:ea typeface="Calibri" pitchFamily="34" charset="-122"/>
@@ -8094,7 +7688,7 @@
             <a:r>
               <a:rPr lang="en-US" sz="900" dirty="0">
                 <a:solidFill>
-                  <a:srgbClr val="94A3B8"/>
+                  <a:srgbClr val="64748B"/>
                 </a:solidFill>
                 <a:latin typeface="Calibri" pitchFamily="34" charset="0"/>
                 <a:ea typeface="Calibri" pitchFamily="34" charset="-122"/>
@@ -8106,38 +7700,9 @@
           </a:p>
         </p:txBody>
       </p:sp>
-      <p:sp>
-        <p:nvSpPr>
-          <p:cNvPr id="13" name="Shape 10"/>
-          <p:cNvSpPr/>
-          <p:nvPr/>
-        </p:nvSpPr>
-        <p:spPr>
-          <a:xfrm>
-            <a:off x="7772400" y="4590288"/>
-            <a:ext cx="969264" cy="475488"/>
-          </a:xfrm>
-          <a:prstGeom prst="roundRect">
-            <a:avLst>
-              <a:gd name="adj" fmla="val 11538"/>
-            </a:avLst>
-          </a:prstGeom>
-          <a:solidFill>
-            <a:srgbClr val="FFFFFF"/>
-          </a:solidFill>
-          <a:ln/>
-          <a:effectLst>
-            <a:outerShdw sx="100000" sy="100000" kx="0" ky="0" algn="bl" rotWithShape="0" blurRad="101600" dist="38100" dir="5400000">
-              <a:srgbClr val="000000">
-                <a:alpha val="35000"/>
-              </a:srgbClr>
-            </a:outerShdw>
-          </a:effectLst>
-        </p:spPr>
-      </p:sp>
       <p:pic>
         <p:nvPicPr>
-          <p:cNvPr id="14" name="Image 1" descr="/Users/pop7/Library/CloudStorage/OneDrive-MonsterConnectCo.,Ltd/Lecture/KOSEN69 - software-security/slides/pptx/assets/logo-small.png">    </p:cNvPr>
+          <p:cNvPr id="13" name="Image 1" descr="/Users/pop7/Library/CloudStorage/OneDrive-MonsterConnectCo.,Ltd/Lecture/KOSEN69 - software-security/slides/pptx/assets/logo-small.png">    </p:cNvPr>
           <p:cNvPicPr>
             <a:picLocks noChangeAspect="1"/>
           </p:cNvPicPr>
@@ -8151,7 +7716,7 @@
         </p:blipFill>
         <p:spPr>
           <a:xfrm>
-            <a:off x="7872984" y="4681728"/>
+            <a:off x="7882128" y="4700016"/>
             <a:ext cx="768096" cy="356616"/>
           </a:xfrm>
           <a:prstGeom prst="rect">
@@ -8173,7 +7738,7 @@
     <p:bg>
       <p:bgPr>
         <a:solidFill>
-          <a:srgbClr val="0E1726"/>
+          <a:srgbClr val="FFFFFF"/>
         </a:solidFill>
       </p:bgPr>
     </p:bg>
@@ -8210,9 +7775,9 @@
           </a:solidFill>
           <a:ln/>
           <a:effectLst>
-            <a:outerShdw sx="100000" sy="100000" kx="0" ky="0" algn="bl" rotWithShape="0" blurRad="101600" dist="38100" dir="5400000">
+            <a:outerShdw sx="100000" sy="100000" kx="0" ky="0" algn="bl" rotWithShape="0" blurRad="76200" dist="25400" dir="5400000">
               <a:srgbClr val="000000">
-                <a:alpha val="35000"/>
+                <a:alpha val="12000"/>
               </a:srgbClr>
             </a:outerShdw>
           </a:effectLst>
@@ -8269,7 +7834,7 @@
             <a:r>
               <a:rPr lang="en-US" sz="2600" b="1" dirty="0">
                 <a:solidFill>
-                  <a:srgbClr val="E6EDF3"/>
+                  <a:srgbClr val="1F2937"/>
                 </a:solidFill>
                 <a:latin typeface="Arial" pitchFamily="34" charset="0"/>
                 <a:ea typeface="Arial" pitchFamily="34" charset="-122"/>
@@ -8298,13 +7863,13 @@
             </a:avLst>
           </a:prstGeom>
           <a:solidFill>
-            <a:srgbClr val="18243A"/>
+            <a:srgbClr val="F1F5F9"/>
           </a:solidFill>
           <a:ln/>
           <a:effectLst>
-            <a:outerShdw sx="100000" sy="100000" kx="0" ky="0" algn="bl" rotWithShape="0" blurRad="101600" dist="38100" dir="5400000">
+            <a:outerShdw sx="100000" sy="100000" kx="0" ky="0" algn="bl" rotWithShape="0" blurRad="76200" dist="25400" dir="5400000">
               <a:srgbClr val="000000">
-                <a:alpha val="35000"/>
+                <a:alpha val="12000"/>
               </a:srgbClr>
             </a:outerShdw>
           </a:effectLst>
@@ -8341,7 +7906,7 @@
             <a:r>
               <a:rPr lang="en-US" sz="1400" dirty="0">
                 <a:solidFill>
-                  <a:srgbClr val="E6EDF3"/>
+                  <a:srgbClr val="1F2937"/>
                 </a:solidFill>
                 <a:latin typeface="Calibri" pitchFamily="34" charset="0"/>
                 <a:ea typeface="Calibri" pitchFamily="34" charset="-122"/>
@@ -8362,7 +7927,7 @@
             <a:r>
               <a:rPr lang="en-US" sz="1400" dirty="0">
                 <a:solidFill>
-                  <a:srgbClr val="E6EDF3"/>
+                  <a:srgbClr val="1F2937"/>
                 </a:solidFill>
                 <a:latin typeface="Calibri" pitchFamily="34" charset="0"/>
                 <a:ea typeface="Calibri" pitchFamily="34" charset="-122"/>
@@ -8383,7 +7948,7 @@
             <a:r>
               <a:rPr lang="en-US" sz="1400" dirty="0">
                 <a:solidFill>
-                  <a:srgbClr val="E6EDF3"/>
+                  <a:srgbClr val="1F2937"/>
                 </a:solidFill>
                 <a:latin typeface="Calibri" pitchFamily="34" charset="0"/>
                 <a:ea typeface="Calibri" pitchFamily="34" charset="-122"/>
@@ -8404,7 +7969,7 @@
             <a:r>
               <a:rPr lang="en-US" sz="1400" dirty="0">
                 <a:solidFill>
-                  <a:srgbClr val="E6EDF3"/>
+                  <a:srgbClr val="1F2937"/>
                 </a:solidFill>
                 <a:latin typeface="Calibri" pitchFamily="34" charset="0"/>
                 <a:ea typeface="Calibri" pitchFamily="34" charset="-122"/>
@@ -8443,7 +8008,7 @@
             <a:r>
               <a:rPr lang="en-US" sz="900" dirty="0">
                 <a:solidFill>
-                  <a:srgbClr val="94A3B8"/>
+                  <a:srgbClr val="64748B"/>
                 </a:solidFill>
                 <a:latin typeface="Calibri" pitchFamily="34" charset="0"/>
                 <a:ea typeface="Calibri" pitchFamily="34" charset="-122"/>
@@ -8455,38 +8020,9 @@
           </a:p>
         </p:txBody>
       </p:sp>
-      <p:sp>
-        <p:nvSpPr>
-          <p:cNvPr id="8" name="Shape 5"/>
-          <p:cNvSpPr/>
-          <p:nvPr/>
-        </p:nvSpPr>
-        <p:spPr>
-          <a:xfrm>
-            <a:off x="7772400" y="4590288"/>
-            <a:ext cx="969264" cy="475488"/>
-          </a:xfrm>
-          <a:prstGeom prst="roundRect">
-            <a:avLst>
-              <a:gd name="adj" fmla="val 11538"/>
-            </a:avLst>
-          </a:prstGeom>
-          <a:solidFill>
-            <a:srgbClr val="FFFFFF"/>
-          </a:solidFill>
-          <a:ln/>
-          <a:effectLst>
-            <a:outerShdw sx="100000" sy="100000" kx="0" ky="0" algn="bl" rotWithShape="0" blurRad="101600" dist="38100" dir="5400000">
-              <a:srgbClr val="000000">
-                <a:alpha val="35000"/>
-              </a:srgbClr>
-            </a:outerShdw>
-          </a:effectLst>
-        </p:spPr>
-      </p:sp>
       <p:pic>
         <p:nvPicPr>
-          <p:cNvPr id="9" name="Image 1" descr="/Users/pop7/Library/CloudStorage/OneDrive-MonsterConnectCo.,Ltd/Lecture/KOSEN69 - software-security/slides/pptx/assets/logo-small.png">    </p:cNvPr>
+          <p:cNvPr id="8" name="Image 1" descr="/Users/pop7/Library/CloudStorage/OneDrive-MonsterConnectCo.,Ltd/Lecture/KOSEN69 - software-security/slides/pptx/assets/logo-small.png">    </p:cNvPr>
           <p:cNvPicPr>
             <a:picLocks noChangeAspect="1"/>
           </p:cNvPicPr>
@@ -8500,7 +8036,7 @@
         </p:blipFill>
         <p:spPr>
           <a:xfrm>
-            <a:off x="7872984" y="4681728"/>
+            <a:off x="7882128" y="4700016"/>
             <a:ext cx="768096" cy="356616"/>
           </a:xfrm>
           <a:prstGeom prst="rect">
@@ -8522,7 +8058,7 @@
     <p:bg>
       <p:bgPr>
         <a:solidFill>
-          <a:srgbClr val="0E1726"/>
+          <a:srgbClr val="FFFFFF"/>
         </a:solidFill>
       </p:bgPr>
     </p:bg>
@@ -8559,9 +8095,9 @@
           </a:solidFill>
           <a:ln/>
           <a:effectLst>
-            <a:outerShdw sx="100000" sy="100000" kx="0" ky="0" algn="bl" rotWithShape="0" blurRad="101600" dist="38100" dir="5400000">
+            <a:outerShdw sx="100000" sy="100000" kx="0" ky="0" algn="bl" rotWithShape="0" blurRad="76200" dist="25400" dir="5400000">
               <a:srgbClr val="000000">
-                <a:alpha val="35000"/>
+                <a:alpha val="12000"/>
               </a:srgbClr>
             </a:outerShdw>
           </a:effectLst>
@@ -8618,7 +8154,7 @@
             <a:r>
               <a:rPr lang="en-US" sz="2600" b="1" dirty="0">
                 <a:solidFill>
-                  <a:srgbClr val="E6EDF3"/>
+                  <a:srgbClr val="1F2937"/>
                 </a:solidFill>
                 <a:latin typeface="Arial" pitchFamily="34" charset="0"/>
                 <a:ea typeface="Arial" pitchFamily="34" charset="-122"/>
@@ -8647,13 +8183,13 @@
             </a:avLst>
           </a:prstGeom>
           <a:solidFill>
-            <a:srgbClr val="18243A"/>
+            <a:srgbClr val="F1F5F9"/>
           </a:solidFill>
           <a:ln/>
           <a:effectLst>
-            <a:outerShdw sx="100000" sy="100000" kx="0" ky="0" algn="bl" rotWithShape="0" blurRad="101600" dist="38100" dir="5400000">
+            <a:outerShdw sx="100000" sy="100000" kx="0" ky="0" algn="bl" rotWithShape="0" blurRad="76200" dist="25400" dir="5400000">
               <a:srgbClr val="000000">
-                <a:alpha val="35000"/>
+                <a:alpha val="12000"/>
               </a:srgbClr>
             </a:outerShdw>
           </a:effectLst>
@@ -8690,7 +8226,7 @@
             <a:r>
               <a:rPr lang="en-US" sz="1400" dirty="0">
                 <a:solidFill>
-                  <a:srgbClr val="E6EDF3"/>
+                  <a:srgbClr val="1F2937"/>
                 </a:solidFill>
                 <a:latin typeface="Calibri" pitchFamily="34" charset="0"/>
                 <a:ea typeface="Calibri" pitchFamily="34" charset="-122"/>
@@ -8711,7 +8247,7 @@
             <a:r>
               <a:rPr lang="en-US" sz="1400" dirty="0">
                 <a:solidFill>
-                  <a:srgbClr val="E6EDF3"/>
+                  <a:srgbClr val="1F2937"/>
                 </a:solidFill>
                 <a:latin typeface="Calibri" pitchFamily="34" charset="0"/>
                 <a:ea typeface="Calibri" pitchFamily="34" charset="-122"/>
@@ -8732,7 +8268,7 @@
             <a:r>
               <a:rPr lang="en-US" sz="1400" dirty="0">
                 <a:solidFill>
-                  <a:srgbClr val="E6EDF3"/>
+                  <a:srgbClr val="1F2937"/>
                 </a:solidFill>
                 <a:latin typeface="Calibri" pitchFamily="34" charset="0"/>
                 <a:ea typeface="Calibri" pitchFamily="34" charset="-122"/>
@@ -8753,7 +8289,7 @@
             <a:r>
               <a:rPr lang="en-US" sz="1400" dirty="0">
                 <a:solidFill>
-                  <a:srgbClr val="E6EDF3"/>
+                  <a:srgbClr val="1F2937"/>
                 </a:solidFill>
                 <a:latin typeface="Calibri" pitchFamily="34" charset="0"/>
                 <a:ea typeface="Calibri" pitchFamily="34" charset="-122"/>
@@ -8792,7 +8328,7 @@
             <a:r>
               <a:rPr lang="en-US" sz="900" dirty="0">
                 <a:solidFill>
-                  <a:srgbClr val="94A3B8"/>
+                  <a:srgbClr val="64748B"/>
                 </a:solidFill>
                 <a:latin typeface="Calibri" pitchFamily="34" charset="0"/>
                 <a:ea typeface="Calibri" pitchFamily="34" charset="-122"/>
@@ -8804,38 +8340,9 @@
           </a:p>
         </p:txBody>
       </p:sp>
-      <p:sp>
-        <p:nvSpPr>
-          <p:cNvPr id="8" name="Shape 5"/>
-          <p:cNvSpPr/>
-          <p:nvPr/>
-        </p:nvSpPr>
-        <p:spPr>
-          <a:xfrm>
-            <a:off x="7772400" y="4590288"/>
-            <a:ext cx="969264" cy="475488"/>
-          </a:xfrm>
-          <a:prstGeom prst="roundRect">
-            <a:avLst>
-              <a:gd name="adj" fmla="val 11538"/>
-            </a:avLst>
-          </a:prstGeom>
-          <a:solidFill>
-            <a:srgbClr val="FFFFFF"/>
-          </a:solidFill>
-          <a:ln/>
-          <a:effectLst>
-            <a:outerShdw sx="100000" sy="100000" kx="0" ky="0" algn="bl" rotWithShape="0" blurRad="101600" dist="38100" dir="5400000">
-              <a:srgbClr val="000000">
-                <a:alpha val="35000"/>
-              </a:srgbClr>
-            </a:outerShdw>
-          </a:effectLst>
-        </p:spPr>
-      </p:sp>
       <p:pic>
         <p:nvPicPr>
-          <p:cNvPr id="9" name="Image 1" descr="/Users/pop7/Library/CloudStorage/OneDrive-MonsterConnectCo.,Ltd/Lecture/KOSEN69 - software-security/slides/pptx/assets/logo-small.png">    </p:cNvPr>
+          <p:cNvPr id="8" name="Image 1" descr="/Users/pop7/Library/CloudStorage/OneDrive-MonsterConnectCo.,Ltd/Lecture/KOSEN69 - software-security/slides/pptx/assets/logo-small.png">    </p:cNvPr>
           <p:cNvPicPr>
             <a:picLocks noChangeAspect="1"/>
           </p:cNvPicPr>
@@ -8849,7 +8356,7 @@
         </p:blipFill>
         <p:spPr>
           <a:xfrm>
-            <a:off x="7872984" y="4681728"/>
+            <a:off x="7882128" y="4700016"/>
             <a:ext cx="768096" cy="356616"/>
           </a:xfrm>
           <a:prstGeom prst="rect">
@@ -8871,7 +8378,7 @@
     <p:bg>
       <p:bgPr>
         <a:solidFill>
-          <a:srgbClr val="0E1726"/>
+          <a:srgbClr val="FFFFFF"/>
         </a:solidFill>
       </p:bgPr>
     </p:bg>
@@ -8908,9 +8415,9 @@
           </a:solidFill>
           <a:ln/>
           <a:effectLst>
-            <a:outerShdw sx="100000" sy="100000" kx="0" ky="0" algn="bl" rotWithShape="0" blurRad="101600" dist="38100" dir="5400000">
+            <a:outerShdw sx="100000" sy="100000" kx="0" ky="0" algn="bl" rotWithShape="0" blurRad="76200" dist="25400" dir="5400000">
               <a:srgbClr val="000000">
-                <a:alpha val="35000"/>
+                <a:alpha val="12000"/>
               </a:srgbClr>
             </a:outerShdw>
           </a:effectLst>
@@ -8967,7 +8474,7 @@
             <a:r>
               <a:rPr lang="en-US" sz="2600" b="1" dirty="0">
                 <a:solidFill>
-                  <a:srgbClr val="E6EDF3"/>
+                  <a:srgbClr val="1F2937"/>
                 </a:solidFill>
                 <a:latin typeface="Arial" pitchFamily="34" charset="0"/>
                 <a:ea typeface="Arial" pitchFamily="34" charset="-122"/>
@@ -8996,13 +8503,13 @@
             </a:avLst>
           </a:prstGeom>
           <a:solidFill>
-            <a:srgbClr val="18243A"/>
+            <a:srgbClr val="F1F5F9"/>
           </a:solidFill>
           <a:ln/>
           <a:effectLst>
-            <a:outerShdw sx="100000" sy="100000" kx="0" ky="0" algn="bl" rotWithShape="0" blurRad="101600" dist="38100" dir="5400000">
+            <a:outerShdw sx="100000" sy="100000" kx="0" ky="0" algn="bl" rotWithShape="0" blurRad="76200" dist="25400" dir="5400000">
               <a:srgbClr val="000000">
-                <a:alpha val="35000"/>
+                <a:alpha val="12000"/>
               </a:srgbClr>
             </a:outerShdw>
           </a:effectLst>
@@ -9039,7 +8546,7 @@
             <a:r>
               <a:rPr lang="en-US" sz="1400" dirty="0">
                 <a:solidFill>
-                  <a:srgbClr val="E6EDF3"/>
+                  <a:srgbClr val="1F2937"/>
                 </a:solidFill>
                 <a:latin typeface="Calibri" pitchFamily="34" charset="0"/>
                 <a:ea typeface="Calibri" pitchFamily="34" charset="-122"/>
@@ -9060,7 +8567,7 @@
             <a:r>
               <a:rPr lang="en-US" sz="1400" dirty="0">
                 <a:solidFill>
-                  <a:srgbClr val="E6EDF3"/>
+                  <a:srgbClr val="1F2937"/>
                 </a:solidFill>
                 <a:latin typeface="Calibri" pitchFamily="34" charset="0"/>
                 <a:ea typeface="Calibri" pitchFamily="34" charset="-122"/>
@@ -9081,7 +8588,7 @@
             <a:r>
               <a:rPr lang="en-US" sz="1400" dirty="0">
                 <a:solidFill>
-                  <a:srgbClr val="E6EDF3"/>
+                  <a:srgbClr val="1F2937"/>
                 </a:solidFill>
                 <a:latin typeface="Calibri" pitchFamily="34" charset="0"/>
                 <a:ea typeface="Calibri" pitchFamily="34" charset="-122"/>
@@ -9120,7 +8627,7 @@
             <a:r>
               <a:rPr lang="en-US" sz="900" dirty="0">
                 <a:solidFill>
-                  <a:srgbClr val="94A3B8"/>
+                  <a:srgbClr val="64748B"/>
                 </a:solidFill>
                 <a:latin typeface="Calibri" pitchFamily="34" charset="0"/>
                 <a:ea typeface="Calibri" pitchFamily="34" charset="-122"/>
@@ -9132,38 +8639,9 @@
           </a:p>
         </p:txBody>
       </p:sp>
-      <p:sp>
-        <p:nvSpPr>
-          <p:cNvPr id="8" name="Shape 5"/>
-          <p:cNvSpPr/>
-          <p:nvPr/>
-        </p:nvSpPr>
-        <p:spPr>
-          <a:xfrm>
-            <a:off x="7772400" y="4590288"/>
-            <a:ext cx="969264" cy="475488"/>
-          </a:xfrm>
-          <a:prstGeom prst="roundRect">
-            <a:avLst>
-              <a:gd name="adj" fmla="val 11538"/>
-            </a:avLst>
-          </a:prstGeom>
-          <a:solidFill>
-            <a:srgbClr val="FFFFFF"/>
-          </a:solidFill>
-          <a:ln/>
-          <a:effectLst>
-            <a:outerShdw sx="100000" sy="100000" kx="0" ky="0" algn="bl" rotWithShape="0" blurRad="101600" dist="38100" dir="5400000">
-              <a:srgbClr val="000000">
-                <a:alpha val="35000"/>
-              </a:srgbClr>
-            </a:outerShdw>
-          </a:effectLst>
-        </p:spPr>
-      </p:sp>
       <p:pic>
         <p:nvPicPr>
-          <p:cNvPr id="9" name="Image 1" descr="/Users/pop7/Library/CloudStorage/OneDrive-MonsterConnectCo.,Ltd/Lecture/KOSEN69 - software-security/slides/pptx/assets/logo-small.png">    </p:cNvPr>
+          <p:cNvPr id="8" name="Image 1" descr="/Users/pop7/Library/CloudStorage/OneDrive-MonsterConnectCo.,Ltd/Lecture/KOSEN69 - software-security/slides/pptx/assets/logo-small.png">    </p:cNvPr>
           <p:cNvPicPr>
             <a:picLocks noChangeAspect="1"/>
           </p:cNvPicPr>
@@ -9177,7 +8655,7 @@
         </p:blipFill>
         <p:spPr>
           <a:xfrm>
-            <a:off x="7872984" y="4681728"/>
+            <a:off x="7882128" y="4700016"/>
             <a:ext cx="768096" cy="356616"/>
           </a:xfrm>
           <a:prstGeom prst="rect">

--- a/slides/pptx/week04.pptx
+++ b/slides/pptx/week04.pptx
@@ -519,7 +519,7 @@
           <a:p>
             <a:r>
               <a:rPr lang="en-US" dirty="0"/>
-              <a:t/>
+              <a:t>Hook: type one quote mark into a login box and become admin — promise that demo. Injection is the oldest trick that still works. Today they exploit it, then fix it for real. ~2 min.</a:t>
             </a:r>
             <a:endParaRPr lang="en-US" dirty="0"/>
           </a:p>
@@ -607,7 +607,7 @@
           <a:p>
             <a:r>
               <a:rPr lang="en-US" dirty="0"/>
-              <a:t/>
+              <a:t>Same pattern, deadlier outcome (RCE = own the server, not just the DB). Walk the metacharacters: `;` chains a second command. Ask: "what does `8.8.8.8; cat /etc/passwd` run?" ~5 min.</a:t>
             </a:r>
             <a:endParaRPr lang="en-US" dirty="0"/>
           </a:p>
@@ -695,7 +695,7 @@
           <a:p>
             <a:r>
               <a:rPr lang="en-US" dirty="0"/>
-              <a:t/>
+              <a:t>Connects to W1's /upload threat model — now it's a full exploit chain. The webshell is tiny and total. This reappears in the W6 log-reading slide. Stress the layered fix (type + extension + location + no-exec). ~5 min.</a:t>
             </a:r>
             <a:endParaRPr lang="en-US" dirty="0"/>
           </a:p>
@@ -783,7 +783,7 @@
           <a:p>
             <a:r>
               <a:rPr lang="en-US" dirty="0"/>
-              <a:t/>
+              <a:t>They map every lab finding to a CWE id. Quick slide — these are the ids to cite in the worksheet. ~1 min.</a:t>
             </a:r>
             <a:endParaRPr lang="en-US" dirty="0"/>
           </a:p>
@@ -871,7 +871,7 @@
           <a:p>
             <a:r>
               <a:rPr lang="en-US" dirty="0"/>
-              <a:t/>
+              <a:t>The payoff. #1 message: parameterization makes data STAY data — the DB never parses it as SQL. For shells, pass an argv array, not a string. Least-privilege limits blast radius if they still get in. ~5 min.</a:t>
             </a:r>
             <a:endParaRPr lang="en-US" dirty="0"/>
           </a:p>
@@ -959,7 +959,7 @@
           <a:p>
             <a:r>
               <a:rPr lang="en-US" dirty="0"/>
-              <a:t/>
+              <a:t>Explain before lab: levels escalate (raw → quoted → filtered → boss). Round 2 (patch it) is where the real learning is — and the deliverable. Leaderboard on capture time. Flags are per-student. ~3 min.</a:t>
             </a:r>
             <a:endParaRPr lang="en-US" dirty="0"/>
           </a:p>
@@ -1047,7 +1047,7 @@
           <a:p>
             <a:r>
               <a:rPr lang="en-US" dirty="0"/>
-              <a:t/>
+              <a:t>Logistics. Circulate with TAs. Remind: step 4 (rewrite + prove the payload now fails) is graded, not just the exploit. Also kick off the NoteVault project injection task (worksheet).</a:t>
             </a:r>
             <a:endParaRPr lang="en-US" dirty="0"/>
           </a:p>
@@ -1135,7 +1135,7 @@
           <a:p>
             <a:r>
               <a:rPr lang="en-US" dirty="0"/>
-              <a:t/>
+              <a:t>Set expectations: before AND after code + proof. The AI-resilient tasks are part of the grade. Q6 of this week's quiz asks for their own payload + personal flag.</a:t>
             </a:r>
             <a:endParaRPr lang="en-US" dirty="0"/>
           </a:p>
@@ -1223,7 +1223,7 @@
           <a:p>
             <a:r>
               <a:rPr lang="en-US" dirty="0"/>
-              <a:t/>
+              <a:t>Recap in 3 lines. Cold-call: "what's the ONE fix for SQLi?" (parameterized queries). ~2 min.</a:t>
             </a:r>
             <a:endParaRPr lang="en-US" dirty="0"/>
           </a:p>
@@ -1311,7 +1311,7 @@
           <a:p>
             <a:r>
               <a:rPr lang="en-US" dirty="0"/>
-              <a:t/>
+              <a:t>Cliffhanger: "Next week the same trick runs in the victim's browser — and skims credit cards." Remind DVWA/Juice Shop ready in their VM.</a:t>
             </a:r>
             <a:endParaRPr lang="en-US" dirty="0"/>
           </a:p>
@@ -1399,7 +1399,7 @@
           <a:p>
             <a:r>
               <a:rPr lang="en-US" dirty="0"/>
-              <a:t/>
+              <a:t>Roadmap, 1 min. Tell them the one big idea (data becomes code) unifies SQLi, command injection, and even XSS next week. Lab = exploit DVWA/Juice Shop then patch it.</a:t>
             </a:r>
             <a:endParaRPr lang="en-US" dirty="0"/>
           </a:p>
@@ -1487,7 +1487,7 @@
           <a:p>
             <a:r>
               <a:rPr lang="en-US" dirty="0"/>
-              <a:t/>
+              <a:t>1-min bridge. Last week we protected data at rest; today the attacker sends malicious data IN. Cold-call: "how should we store passwords?" to check W3 stuck.</a:t>
             </a:r>
             <a:endParaRPr lang="en-US" dirty="0"/>
           </a:p>
@@ -1575,7 +1575,7 @@
           <a:p>
             <a:r>
               <a:rPr lang="en-US" dirty="0"/>
-              <a:t/>
+              <a:t>This is THE mental model for the whole week — say it twice. Every injection is the same shape: an interpreter can't tell your data from its own instructions. Ask the class to name interpreters in a typical app (DB, shell, template). ~5 min.</a:t>
             </a:r>
             <a:endParaRPr lang="en-US" dirty="0"/>
           </a:p>
@@ -1663,7 +1663,7 @@
           <a:p>
             <a:r>
               <a:rPr lang="en-US" dirty="0"/>
-              <a:t/>
+              <a:t>Walk the string-concatenation on the board: show how the quote in the input lands inside the SQL string and breaks out. Distinguish UNION (read other tables in one shot) vs blind (no output → infer via true/false or timing). ~7 min.</a:t>
             </a:r>
             <a:endParaRPr lang="en-US" dirty="0"/>
           </a:p>
@@ -1751,7 +1751,7 @@
           <a:p>
             <a:r>
               <a:rPr lang="en-US" dirty="0"/>
-              <a:t/>
+              <a:t>The worked example — slow down here. Decompose the payload token by token; this is exactly the SQLi Boss Fight round 1. Stress the space after `--` (MySQL needs it) — the #1 reason a student's payload "doesn't work". ~8 min.</a:t>
             </a:r>
             <a:endParaRPr lang="en-US" dirty="0"/>
           </a:p>
@@ -1839,7 +1839,7 @@
           <a:p>
             <a:r>
               <a:rPr lang="en-US" dirty="0"/>
-              <a:t/>
+              <a:t>Make it real — these are careers ended and companies fined. Equifax = a single unpatched input parser. Tie back: every breach here started as "untrusted data interpreted as code". ~4 min.</a:t>
             </a:r>
             <a:endParaRPr lang="en-US" dirty="0"/>
           </a:p>
@@ -1927,7 +1927,7 @@
           <a:p>
             <a:r>
               <a:rPr lang="en-US" dirty="0"/>
-              <a:t/>
+              <a:t>Key principle that recurs all term. Block-lists always lose (attackers invent new payloads); allow-lists define what's acceptable. Emphasize: validation is defense-in-depth, NOT the primary SQLi fix (that's parameterization — next). ~4 min.</a:t>
             </a:r>
             <a:endParaRPr lang="en-US" dirty="0"/>
           </a:p>
@@ -2015,7 +2015,7 @@
           <a:p>
             <a:r>
               <a:rPr lang="en-US" dirty="0"/>
-              <a:t/>
+              <a:t>Point out injection isn't just login boxes — any input reaching an interpreter. Note verbose DB errors are a gift to attackers (schema leakage). Reiterate ethics: sqlmap only on provided sandbox targets. ~3 min.</a:t>
             </a:r>
             <a:endParaRPr lang="en-US" dirty="0"/>
           </a:p>
@@ -5250,11 +5250,11 @@
         <p:spPr>
           <a:xfrm>
             <a:off x="457200" y="1325880"/>
-            <a:ext cx="8229600" cy="1207008"/>
+            <a:ext cx="8229600" cy="1517904"/>
           </a:xfrm>
           <a:prstGeom prst="roundRect">
             <a:avLst>
-              <a:gd name="adj" fmla="val 6061"/>
+              <a:gd name="adj" fmla="val 4819"/>
             </a:avLst>
           </a:prstGeom>
           <a:solidFill>
@@ -5279,7 +5279,7 @@
         <p:spPr>
           <a:xfrm>
             <a:off x="731520" y="1435608"/>
-            <a:ext cx="7680960" cy="987552"/>
+            <a:ext cx="7680960" cy="1298448"/>
           </a:xfrm>
           <a:prstGeom prst="rect">
             <a:avLst/>
@@ -5350,6 +5350,27 @@
                 <a:cs typeface="Calibri" pitchFamily="34" charset="-120"/>
               </a:rPr>
               <a:t>Proof the payload no longer works</a:t>
+            </a:r>
+            <a:endParaRPr lang="en-US" sz="1400" dirty="0"/>
+          </a:p>
+          <a:p>
+            <a:pPr marL="342900" indent="-342900">
+              <a:spcAft>
+                <a:spcPts val="600"/>
+              </a:spcAft>
+              <a:buSzPct val="100000"/>
+              <a:buChar char="•"/>
+            </a:pPr>
+            <a:r>
+              <a:rPr lang="en-US" sz="1400" dirty="0">
+                <a:solidFill>
+                  <a:srgbClr val="1F2937"/>
+                </a:solidFill>
+                <a:latin typeface="Calibri" pitchFamily="34" charset="0"/>
+                <a:ea typeface="Calibri" pitchFamily="34" charset="-122"/>
+                <a:cs typeface="Calibri" pitchFamily="34" charset="-120"/>
+              </a:rPr>
+              <a:t>+ Audit the AI / EiPE / Prompt Problem (see worksheet)</a:t>
             </a:r>
             <a:endParaRPr lang="en-US" sz="1400" dirty="0"/>
           </a:p>

--- a/slides/pptx/week04.pptx
+++ b/slides/pptx/week04.pptx
@@ -4607,6 +4607,67 @@
         <p:spPr>
           <a:xfrm>
             <a:off x="457200" y="1325880"/>
+            <a:ext cx="8229600" cy="822960"/>
+          </a:xfrm>
+          <a:prstGeom prst="roundRect">
+            <a:avLst>
+              <a:gd name="adj" fmla="val 8889"/>
+            </a:avLst>
+          </a:prstGeom>
+          <a:solidFill>
+            <a:srgbClr val="E8EDF3"/>
+          </a:solidFill>
+          <a:ln/>
+        </p:spPr>
+      </p:sp>
+      <p:sp>
+        <p:nvSpPr>
+          <p:cNvPr id="6" name="Text 3"/>
+          <p:cNvSpPr/>
+          <p:nvPr/>
+        </p:nvSpPr>
+        <p:spPr>
+          <a:xfrm>
+            <a:off x="731520" y="1325880"/>
+            <a:ext cx="7680960" cy="822960"/>
+          </a:xfrm>
+          <a:prstGeom prst="rect">
+            <a:avLst/>
+          </a:prstGeom>
+          <a:noFill/>
+          <a:ln/>
+        </p:spPr>
+        <p:txBody>
+          <a:bodyPr wrap="square" lIns="0" tIns="0" rIns="0" bIns="0" rtlCol="0" anchor="ctr"/>
+          <a:lstStyle/>
+          <a:p>
+            <a:pPr indent="0" marL="0">
+              <a:buNone/>
+            </a:pPr>
+            <a:r>
+              <a:rPr lang="en-US" sz="1400" i="1" dirty="0">
+                <a:solidFill>
+                  <a:srgbClr val="E35205"/>
+                </a:solidFill>
+                <a:latin typeface="Calibri" pitchFamily="34" charset="0"/>
+                <a:ea typeface="Calibri" pitchFamily="34" charset="-122"/>
+                <a:cs typeface="Calibri" pitchFamily="34" charset="-120"/>
+              </a:rPr>
+              <a:t>📋 Worksheet 4 — labs/week04-injection/worksheet.md (Part 3) · kickoff: docker compose up → http://localhost:5000</a:t>
+            </a:r>
+            <a:endParaRPr lang="en-US" sz="1400" dirty="0"/>
+          </a:p>
+        </p:txBody>
+      </p:sp>
+      <p:sp>
+        <p:nvSpPr>
+          <p:cNvPr id="7" name="Shape 4"/>
+          <p:cNvSpPr/>
+          <p:nvPr/>
+        </p:nvSpPr>
+        <p:spPr>
+          <a:xfrm>
+            <a:off x="457200" y="2313432"/>
             <a:ext cx="8229600" cy="530352"/>
           </a:xfrm>
           <a:prstGeom prst="roundRect">
@@ -4627,13 +4688,13 @@
       </p:sp>
       <p:sp>
         <p:nvSpPr>
-          <p:cNvPr id="6" name="Text 3"/>
-          <p:cNvSpPr/>
-          <p:nvPr/>
-        </p:nvSpPr>
-        <p:spPr>
-          <a:xfrm>
-            <a:off x="640080" y="1399032"/>
+          <p:cNvPr id="8" name="Text 5"/>
+          <p:cNvSpPr/>
+          <p:nvPr/>
+        </p:nvSpPr>
+        <p:spPr>
+          <a:xfrm>
+            <a:off x="640080" y="2386584"/>
             <a:ext cx="7863840" cy="384048"/>
           </a:xfrm>
           <a:prstGeom prst="rect">
@@ -4658,7 +4719,7 @@
                 <a:ea typeface="Courier New" pitchFamily="34" charset="-122"/>
                 <a:cs typeface="Courier New" pitchFamily="34" charset="-120"/>
               </a:rPr>
-              <a:t>docker run --rm -p 80:80 vulnerables/web-dvwa   # or Juice Shop</a:t>
+              <a:t>docker run --rm -p 80:80 vulnerables/web-dvwa   # optional extra target (or Juice Shop)</a:t>
             </a:r>
             <a:endParaRPr lang="en-US" sz="1150" dirty="0"/>
           </a:p>
@@ -4666,13 +4727,13 @@
       </p:sp>
       <p:sp>
         <p:nvSpPr>
-          <p:cNvPr id="7" name="Shape 4"/>
-          <p:cNvSpPr/>
-          <p:nvPr/>
-        </p:nvSpPr>
-        <p:spPr>
-          <a:xfrm>
-            <a:off x="502920" y="2020824"/>
+          <p:cNvPr id="9" name="Shape 6"/>
+          <p:cNvSpPr/>
+          <p:nvPr/>
+        </p:nvSpPr>
+        <p:spPr>
+          <a:xfrm>
+            <a:off x="502920" y="3008376"/>
             <a:ext cx="384048" cy="384048"/>
           </a:xfrm>
           <a:prstGeom prst="ellipse">
@@ -4686,13 +4747,13 @@
       </p:sp>
       <p:sp>
         <p:nvSpPr>
-          <p:cNvPr id="8" name="Text 5"/>
-          <p:cNvSpPr/>
-          <p:nvPr/>
-        </p:nvSpPr>
-        <p:spPr>
-          <a:xfrm>
-            <a:off x="502920" y="2020824"/>
+          <p:cNvPr id="10" name="Text 7"/>
+          <p:cNvSpPr/>
+          <p:nvPr/>
+        </p:nvSpPr>
+        <p:spPr>
+          <a:xfrm>
+            <a:off x="502920" y="3008376"/>
             <a:ext cx="384048" cy="384048"/>
           </a:xfrm>
           <a:prstGeom prst="rect">
@@ -4725,13 +4786,13 @@
       </p:sp>
       <p:sp>
         <p:nvSpPr>
-          <p:cNvPr id="9" name="Text 6"/>
-          <p:cNvSpPr/>
-          <p:nvPr/>
-        </p:nvSpPr>
-        <p:spPr>
-          <a:xfrm>
-            <a:off x="1051560" y="2020824"/>
+          <p:cNvPr id="11" name="Text 8"/>
+          <p:cNvSpPr/>
+          <p:nvPr/>
+        </p:nvSpPr>
+        <p:spPr>
+          <a:xfrm>
+            <a:off x="1051560" y="3008376"/>
             <a:ext cx="7589520" cy="384048"/>
           </a:xfrm>
           <a:prstGeom prst="rect">
@@ -4764,13 +4825,13 @@
       </p:sp>
       <p:sp>
         <p:nvSpPr>
-          <p:cNvPr id="10" name="Shape 7"/>
-          <p:cNvSpPr/>
-          <p:nvPr/>
-        </p:nvSpPr>
-        <p:spPr>
-          <a:xfrm>
-            <a:off x="502920" y="2478024"/>
+          <p:cNvPr id="12" name="Shape 9"/>
+          <p:cNvSpPr/>
+          <p:nvPr/>
+        </p:nvSpPr>
+        <p:spPr>
+          <a:xfrm>
+            <a:off x="502920" y="3465576"/>
             <a:ext cx="384048" cy="384048"/>
           </a:xfrm>
           <a:prstGeom prst="ellipse">
@@ -4784,13 +4845,13 @@
       </p:sp>
       <p:sp>
         <p:nvSpPr>
-          <p:cNvPr id="11" name="Text 8"/>
-          <p:cNvSpPr/>
-          <p:nvPr/>
-        </p:nvSpPr>
-        <p:spPr>
-          <a:xfrm>
-            <a:off x="502920" y="2478024"/>
+          <p:cNvPr id="13" name="Text 10"/>
+          <p:cNvSpPr/>
+          <p:nvPr/>
+        </p:nvSpPr>
+        <p:spPr>
+          <a:xfrm>
+            <a:off x="502920" y="3465576"/>
             <a:ext cx="384048" cy="384048"/>
           </a:xfrm>
           <a:prstGeom prst="rect">
@@ -4823,13 +4884,13 @@
       </p:sp>
       <p:sp>
         <p:nvSpPr>
-          <p:cNvPr id="12" name="Text 9"/>
-          <p:cNvSpPr/>
-          <p:nvPr/>
-        </p:nvSpPr>
-        <p:spPr>
-          <a:xfrm>
-            <a:off x="1051560" y="2478024"/>
+          <p:cNvPr id="14" name="Text 11"/>
+          <p:cNvSpPr/>
+          <p:nvPr/>
+        </p:nvSpPr>
+        <p:spPr>
+          <a:xfrm>
+            <a:off x="1051560" y="3465576"/>
             <a:ext cx="7589520" cy="384048"/>
           </a:xfrm>
           <a:prstGeom prst="rect">
@@ -4862,13 +4923,13 @@
       </p:sp>
       <p:sp>
         <p:nvSpPr>
-          <p:cNvPr id="13" name="Shape 10"/>
-          <p:cNvSpPr/>
-          <p:nvPr/>
-        </p:nvSpPr>
-        <p:spPr>
-          <a:xfrm>
-            <a:off x="502920" y="2935224"/>
+          <p:cNvPr id="15" name="Shape 12"/>
+          <p:cNvSpPr/>
+          <p:nvPr/>
+        </p:nvSpPr>
+        <p:spPr>
+          <a:xfrm>
+            <a:off x="502920" y="3922776"/>
             <a:ext cx="384048" cy="384048"/>
           </a:xfrm>
           <a:prstGeom prst="ellipse">
@@ -4882,13 +4943,13 @@
       </p:sp>
       <p:sp>
         <p:nvSpPr>
-          <p:cNvPr id="14" name="Text 11"/>
-          <p:cNvSpPr/>
-          <p:nvPr/>
-        </p:nvSpPr>
-        <p:spPr>
-          <a:xfrm>
-            <a:off x="502920" y="2935224"/>
+          <p:cNvPr id="16" name="Text 13"/>
+          <p:cNvSpPr/>
+          <p:nvPr/>
+        </p:nvSpPr>
+        <p:spPr>
+          <a:xfrm>
+            <a:off x="502920" y="3922776"/>
             <a:ext cx="384048" cy="384048"/>
           </a:xfrm>
           <a:prstGeom prst="rect">
@@ -4921,13 +4982,13 @@
       </p:sp>
       <p:sp>
         <p:nvSpPr>
-          <p:cNvPr id="15" name="Text 12"/>
-          <p:cNvSpPr/>
-          <p:nvPr/>
-        </p:nvSpPr>
-        <p:spPr>
-          <a:xfrm>
-            <a:off x="1051560" y="2935224"/>
+          <p:cNvPr id="17" name="Text 14"/>
+          <p:cNvSpPr/>
+          <p:nvPr/>
+        </p:nvSpPr>
+        <p:spPr>
+          <a:xfrm>
+            <a:off x="1051560" y="3922776"/>
             <a:ext cx="7589520" cy="384048"/>
           </a:xfrm>
           <a:prstGeom prst="rect">
@@ -4960,73 +5021,14 @@
       </p:sp>
       <p:sp>
         <p:nvSpPr>
-          <p:cNvPr id="16" name="Shape 13"/>
-          <p:cNvSpPr/>
-          <p:nvPr/>
-        </p:nvSpPr>
-        <p:spPr>
-          <a:xfrm>
-            <a:off x="502920" y="3392424"/>
-            <a:ext cx="384048" cy="384048"/>
-          </a:xfrm>
-          <a:prstGeom prst="ellipse">
-            <a:avLst/>
-          </a:prstGeom>
-          <a:solidFill>
-            <a:srgbClr val="E35205"/>
-          </a:solidFill>
-          <a:ln/>
-        </p:spPr>
-      </p:sp>
-      <p:sp>
-        <p:nvSpPr>
-          <p:cNvPr id="17" name="Text 14"/>
-          <p:cNvSpPr/>
-          <p:nvPr/>
-        </p:nvSpPr>
-        <p:spPr>
-          <a:xfrm>
-            <a:off x="502920" y="3392424"/>
-            <a:ext cx="384048" cy="384048"/>
-          </a:xfrm>
-          <a:prstGeom prst="rect">
-            <a:avLst/>
-          </a:prstGeom>
-          <a:noFill/>
-          <a:ln/>
-        </p:spPr>
-        <p:txBody>
-          <a:bodyPr wrap="square" lIns="0" tIns="0" rIns="0" bIns="0" rtlCol="0" anchor="ctr"/>
-          <a:lstStyle/>
-          <a:p>
-            <a:pPr algn="ctr" indent="0" marL="0">
-              <a:buNone/>
-            </a:pPr>
-            <a:r>
-              <a:rPr lang="en-US" sz="1500" b="1" dirty="0">
-                <a:solidFill>
-                  <a:srgbClr val="0E1726"/>
-                </a:solidFill>
-                <a:latin typeface="Arial" pitchFamily="34" charset="0"/>
-                <a:ea typeface="Arial" pitchFamily="34" charset="-122"/>
-                <a:cs typeface="Arial" pitchFamily="34" charset="-120"/>
-              </a:rPr>
-              <a:t>4</a:t>
-            </a:r>
-            <a:endParaRPr lang="en-US" sz="1500" dirty="0"/>
-          </a:p>
-        </p:txBody>
-      </p:sp>
-      <p:sp>
-        <p:nvSpPr>
           <p:cNvPr id="18" name="Text 15"/>
           <p:cNvSpPr/>
           <p:nvPr/>
         </p:nvSpPr>
         <p:spPr>
           <a:xfrm>
-            <a:off x="1051560" y="3392424"/>
-            <a:ext cx="7589520" cy="384048"/>
+            <a:off x="457200" y="4800600"/>
+            <a:ext cx="6949440" cy="274320"/>
           </a:xfrm>
           <a:prstGeom prst="rect">
             <a:avLst/>
@@ -5042,53 +5044,14 @@
               <a:buNone/>
             </a:pPr>
             <a:r>
-              <a:rPr lang="en-US" sz="1350" dirty="0">
-                <a:solidFill>
-                  <a:srgbClr val="1F2937"/>
+              <a:rPr lang="en-US" sz="900" dirty="0">
+                <a:solidFill>
+                  <a:srgbClr val="64748B"/>
                 </a:solidFill>
                 <a:latin typeface="Calibri" pitchFamily="34" charset="0"/>
                 <a:ea typeface="Calibri" pitchFamily="34" charset="-122"/>
                 <a:cs typeface="Calibri" pitchFamily="34" charset="-120"/>
               </a:rPr>
-              <a:t>Rewrite the endpoint safely &amp; re-test</a:t>
-            </a:r>
-            <a:endParaRPr lang="en-US" sz="1350" dirty="0"/>
-          </a:p>
-        </p:txBody>
-      </p:sp>
-      <p:sp>
-        <p:nvSpPr>
-          <p:cNvPr id="19" name="Text 16"/>
-          <p:cNvSpPr/>
-          <p:nvPr/>
-        </p:nvSpPr>
-        <p:spPr>
-          <a:xfrm>
-            <a:off x="457200" y="4800600"/>
-            <a:ext cx="6949440" cy="274320"/>
-          </a:xfrm>
-          <a:prstGeom prst="rect">
-            <a:avLst/>
-          </a:prstGeom>
-          <a:noFill/>
-          <a:ln/>
-        </p:spPr>
-        <p:txBody>
-          <a:bodyPr wrap="square" lIns="0" tIns="0" rIns="0" bIns="0" rtlCol="0" anchor="ctr"/>
-          <a:lstStyle/>
-          <a:p>
-            <a:pPr indent="0" marL="0">
-              <a:buNone/>
-            </a:pPr>
-            <a:r>
-              <a:rPr lang="en-US" sz="900" dirty="0">
-                <a:solidFill>
-                  <a:srgbClr val="64748B"/>
-                </a:solidFill>
-                <a:latin typeface="Calibri" pitchFamily="34" charset="0"/>
-                <a:ea typeface="Calibri" pitchFamily="34" charset="-122"/>
-                <a:cs typeface="Calibri" pitchFamily="34" charset="-120"/>
-              </a:rPr>
               <a:t>Software Security · Week 4</a:t>
             </a:r>
             <a:endParaRPr lang="en-US" sz="900" dirty="0"/>
@@ -5097,7 +5060,7 @@
       </p:sp>
       <p:pic>
         <p:nvPicPr>
-          <p:cNvPr id="20" name="Image 1" descr="/Users/pop7/Library/CloudStorage/OneDrive-MonsterConnectCo.,Ltd/Lecture/KOSEN69 - software-security/slides/pptx/assets/logo-small.png">    </p:cNvPr>
+          <p:cNvPr id="19" name="Image 1" descr="/Users/pop7/Library/CloudStorage/OneDrive-MonsterConnectCo.,Ltd/Lecture/KOSEN69 - software-security/slides/pptx/assets/logo-small.png">    </p:cNvPr>
           <p:cNvPicPr>
             <a:picLocks noChangeAspect="1"/>
           </p:cNvPicPr>

--- a/slides/pptx/week04.pptx
+++ b/slides/pptx/week04.pptx
@@ -4653,7 +4653,7 @@
                 <a:ea typeface="Calibri" pitchFamily="34" charset="-122"/>
                 <a:cs typeface="Calibri" pitchFamily="34" charset="-120"/>
               </a:rPr>
-              <a:t>📋 Worksheet 4 — labs/week04-injection/worksheet.md (Part 3) · kickoff: docker compose up → http://localhost:5000</a:t>
+              <a:t>📋 Worksheet 4 — labs/week04-injection/worksheet.md (Part 3) · kickoff: docker compose up → http://localhost:8080</a:t>
             </a:r>
             <a:endParaRPr lang="en-US" sz="1400" dirty="0"/>
           </a:p>
